--- a/materials/dist/1주차_오리엔테이션.pptx
+++ b/materials/dist/1주차_오리엔테이션.pptx
@@ -6674,7 +6674,7 @@
             <a:r>
               <a:rPr sz="1125" b="0">
                 <a:solidFill>
-                  <a:srgbClr val="6B7280"/>
+                  <a:srgbClr val="55606F"/>
                 </a:solidFill>
                 <a:latin typeface="맑은 고딕"/>
                 <a:ea typeface="맑은 고딕"/>
@@ -6820,7 +6820,7 @@
             <a:r>
               <a:rPr sz="1125" b="0">
                 <a:solidFill>
-                  <a:srgbClr val="6B7280"/>
+                  <a:srgbClr val="55606F"/>
                 </a:solidFill>
                 <a:latin typeface="맑은 고딕"/>
                 <a:ea typeface="맑은 고딕"/>
@@ -6839,8 +6839,8 @@
         </p:nvSpPr>
         <p:spPr>
           <a:xfrm>
-            <a:off x="6029325" y="3280112"/>
-            <a:ext cx="552450" cy="291465"/>
+            <a:off x="5991225" y="3280112"/>
+            <a:ext cx="628650" cy="291465"/>
           </a:xfrm>
           <a:prstGeom prst="rect">
             <a:avLst/>
@@ -6927,8 +6927,8 @@
         </p:nvSpPr>
         <p:spPr>
           <a:xfrm>
-            <a:off x="6029325" y="3853398"/>
-            <a:ext cx="552450" cy="291465"/>
+            <a:off x="5991225" y="3853398"/>
+            <a:ext cx="628650" cy="291465"/>
           </a:xfrm>
           <a:prstGeom prst="rect">
             <a:avLst/>
@@ -7015,8 +7015,8 @@
         </p:nvSpPr>
         <p:spPr>
           <a:xfrm>
-            <a:off x="6029325" y="4178141"/>
-            <a:ext cx="552450" cy="291465"/>
+            <a:off x="5991225" y="4178141"/>
+            <a:ext cx="628650" cy="291465"/>
           </a:xfrm>
           <a:prstGeom prst="rect">
             <a:avLst/>
@@ -7103,8 +7103,8 @@
         </p:nvSpPr>
         <p:spPr>
           <a:xfrm>
-            <a:off x="6029325" y="4502884"/>
-            <a:ext cx="552450" cy="291465"/>
+            <a:off x="5991225" y="4502884"/>
+            <a:ext cx="628650" cy="291465"/>
           </a:xfrm>
           <a:prstGeom prst="rect">
             <a:avLst/>
@@ -7191,8 +7191,8 @@
         </p:nvSpPr>
         <p:spPr>
           <a:xfrm>
-            <a:off x="6029325" y="4827627"/>
-            <a:ext cx="552450" cy="291465"/>
+            <a:off x="5991225" y="4827627"/>
+            <a:ext cx="628650" cy="291465"/>
           </a:xfrm>
           <a:prstGeom prst="rect">
             <a:avLst/>
@@ -7279,8 +7279,8 @@
         </p:nvSpPr>
         <p:spPr>
           <a:xfrm>
-            <a:off x="6029325" y="5400913"/>
-            <a:ext cx="552450" cy="291465"/>
+            <a:off x="5991225" y="5400913"/>
+            <a:ext cx="628650" cy="291465"/>
           </a:xfrm>
           <a:prstGeom prst="rect">
             <a:avLst/>
@@ -7918,8 +7918,8 @@
         </p:nvSpPr>
         <p:spPr>
           <a:xfrm rot="1639131">
-            <a:off x="129797" y="2577299"/>
-            <a:ext cx="632460" cy="251460"/>
+            <a:off x="91697" y="2577299"/>
+            <a:ext cx="708660" cy="251460"/>
           </a:xfrm>
           <a:prstGeom prst="rect">
             <a:avLst/>
@@ -7959,8 +7959,8 @@
         </p:nvSpPr>
         <p:spPr>
           <a:xfrm rot="2117479">
-            <a:off x="245209" y="2647485"/>
-            <a:ext cx="632460" cy="251460"/>
+            <a:off x="207109" y="2647485"/>
+            <a:ext cx="708660" cy="251460"/>
           </a:xfrm>
           <a:prstGeom prst="rect">
             <a:avLst/>
@@ -8000,8 +8000,8 @@
         </p:nvSpPr>
         <p:spPr>
           <a:xfrm rot="2572833">
-            <a:off x="345025" y="2728562"/>
-            <a:ext cx="632460" cy="251460"/>
+            <a:off x="306925" y="2728562"/>
+            <a:ext cx="708660" cy="251460"/>
           </a:xfrm>
           <a:prstGeom prst="rect">
             <a:avLst/>
@@ -8041,8 +8041,8 @@
         </p:nvSpPr>
         <p:spPr>
           <a:xfrm rot="3027872">
-            <a:off x="433201" y="2822043"/>
-            <a:ext cx="632460" cy="251460"/>
+            <a:off x="395101" y="2822043"/>
+            <a:ext cx="708660" cy="251460"/>
           </a:xfrm>
           <a:prstGeom prst="rect">
             <a:avLst/>
@@ -8082,8 +8082,8 @@
         </p:nvSpPr>
         <p:spPr>
           <a:xfrm rot="3467149">
-            <a:off x="505903" y="2922569"/>
-            <a:ext cx="632460" cy="251460"/>
+            <a:off x="467803" y="2922569"/>
+            <a:ext cx="708660" cy="251460"/>
           </a:xfrm>
           <a:prstGeom prst="rect">
             <a:avLst/>
@@ -8123,8 +8123,8 @@
         </p:nvSpPr>
         <p:spPr>
           <a:xfrm rot="3910712">
-            <a:off x="565710" y="3032639"/>
-            <a:ext cx="632460" cy="251460"/>
+            <a:off x="527610" y="3032639"/>
+            <a:ext cx="708660" cy="251460"/>
           </a:xfrm>
           <a:prstGeom prst="rect">
             <a:avLst/>
@@ -8164,8 +8164,8 @@
         </p:nvSpPr>
         <p:spPr>
           <a:xfrm rot="4377592">
-            <a:off x="612810" y="3155784"/>
-            <a:ext cx="632460" cy="251460"/>
+            <a:off x="574710" y="3155784"/>
+            <a:ext cx="708660" cy="251460"/>
           </a:xfrm>
           <a:prstGeom prst="rect">
             <a:avLst/>
@@ -8205,8 +8205,8 @@
         </p:nvSpPr>
         <p:spPr>
           <a:xfrm>
-            <a:off x="68610" y="3231743"/>
-            <a:ext cx="624780" cy="744855"/>
+            <a:off x="30510" y="3231743"/>
+            <a:ext cx="700980" cy="744855"/>
           </a:xfrm>
           <a:prstGeom prst="rect">
             <a:avLst/>
@@ -10564,8 +10564,8 @@
         </p:nvSpPr>
         <p:spPr>
           <a:xfrm>
-            <a:off x="438150" y="2217093"/>
-            <a:ext cx="11315700" cy="252412"/>
+            <a:off x="442912" y="2217093"/>
+            <a:ext cx="11306175" cy="252412"/>
           </a:xfrm>
           <a:prstGeom prst="rect">
             <a:avLst/>
@@ -11453,8 +11453,8 @@
         </p:nvSpPr>
         <p:spPr>
           <a:xfrm>
-            <a:off x="3008497" y="4194928"/>
-            <a:ext cx="1830586" cy="326337"/>
+            <a:off x="2691642" y="4194928"/>
+            <a:ext cx="2464296" cy="326337"/>
           </a:xfrm>
           <a:prstGeom prst="rect">
             <a:avLst/>
@@ -11494,8 +11494,8 @@
         </p:nvSpPr>
         <p:spPr>
           <a:xfrm>
-            <a:off x="2911535" y="4436037"/>
-            <a:ext cx="2024509" cy="412215"/>
+            <a:off x="2526807" y="4436037"/>
+            <a:ext cx="2793965" cy="412215"/>
           </a:xfrm>
           <a:prstGeom prst="rect">
             <a:avLst/>
@@ -11581,8 +11581,8 @@
         </p:nvSpPr>
         <p:spPr>
           <a:xfrm>
-            <a:off x="3228465" y="5420670"/>
-            <a:ext cx="1390650" cy="309161"/>
+            <a:off x="3065587" y="5420670"/>
+            <a:ext cx="1716405" cy="309161"/>
           </a:xfrm>
           <a:prstGeom prst="rect">
             <a:avLst/>
@@ -11670,8 +11670,8 @@
         </p:nvSpPr>
         <p:spPr>
           <a:xfrm>
-            <a:off x="8167368" y="4194928"/>
-            <a:ext cx="1009948" cy="326337"/>
+            <a:off x="8129268" y="4194928"/>
+            <a:ext cx="1086148" cy="326337"/>
           </a:xfrm>
           <a:prstGeom prst="rect">
             <a:avLst/>
@@ -11711,8 +11711,8 @@
         </p:nvSpPr>
         <p:spPr>
           <a:xfrm>
-            <a:off x="7848578" y="4436037"/>
-            <a:ext cx="1647528" cy="412215"/>
+            <a:off x="7595794" y="4436037"/>
+            <a:ext cx="2153097" cy="412215"/>
           </a:xfrm>
           <a:prstGeom prst="rect">
             <a:avLst/>
@@ -11798,8 +11798,8 @@
         </p:nvSpPr>
         <p:spPr>
           <a:xfrm>
-            <a:off x="8093103" y="5420670"/>
-            <a:ext cx="1158479" cy="309161"/>
+            <a:off x="8011486" y="5420670"/>
+            <a:ext cx="1321714" cy="309161"/>
           </a:xfrm>
           <a:prstGeom prst="rect">
             <a:avLst/>
@@ -11839,8 +11839,8 @@
         </p:nvSpPr>
         <p:spPr>
           <a:xfrm>
-            <a:off x="429509" y="4767205"/>
-            <a:ext cx="724198" cy="291985"/>
+            <a:off x="620009" y="4767205"/>
+            <a:ext cx="800398" cy="291985"/>
           </a:xfrm>
           <a:prstGeom prst="rect">
             <a:avLst/>
@@ -11853,7 +11853,7 @@
           </a:bodyPr>
           <a:lstStyle/>
           <a:p>
-            <a:pPr algn="ctr">
+            <a:pPr algn="l">
               <a:lnSpc>
                 <a:spcPts val="1622"/>
               </a:lnSpc>
@@ -12431,8 +12431,8 @@
         </p:nvSpPr>
         <p:spPr>
           <a:xfrm rot="1639131">
-            <a:off x="129797" y="2577299"/>
-            <a:ext cx="632460" cy="251460"/>
+            <a:off x="91697" y="2577299"/>
+            <a:ext cx="708660" cy="251460"/>
           </a:xfrm>
           <a:prstGeom prst="rect">
             <a:avLst/>
@@ -12472,8 +12472,8 @@
         </p:nvSpPr>
         <p:spPr>
           <a:xfrm rot="2117479">
-            <a:off x="245209" y="2647485"/>
-            <a:ext cx="632460" cy="251460"/>
+            <a:off x="207109" y="2647485"/>
+            <a:ext cx="708660" cy="251460"/>
           </a:xfrm>
           <a:prstGeom prst="rect">
             <a:avLst/>
@@ -12513,8 +12513,8 @@
         </p:nvSpPr>
         <p:spPr>
           <a:xfrm rot="2572833">
-            <a:off x="345025" y="2728562"/>
-            <a:ext cx="632460" cy="251460"/>
+            <a:off x="306925" y="2728562"/>
+            <a:ext cx="708660" cy="251460"/>
           </a:xfrm>
           <a:prstGeom prst="rect">
             <a:avLst/>
@@ -12554,8 +12554,8 @@
         </p:nvSpPr>
         <p:spPr>
           <a:xfrm rot="3027872">
-            <a:off x="433201" y="2822043"/>
-            <a:ext cx="632460" cy="251460"/>
+            <a:off x="395101" y="2822043"/>
+            <a:ext cx="708660" cy="251460"/>
           </a:xfrm>
           <a:prstGeom prst="rect">
             <a:avLst/>
@@ -12595,8 +12595,8 @@
         </p:nvSpPr>
         <p:spPr>
           <a:xfrm rot="3467149">
-            <a:off x="505903" y="2922569"/>
-            <a:ext cx="632460" cy="251460"/>
+            <a:off x="467803" y="2922569"/>
+            <a:ext cx="708660" cy="251460"/>
           </a:xfrm>
           <a:prstGeom prst="rect">
             <a:avLst/>
@@ -12636,8 +12636,8 @@
         </p:nvSpPr>
         <p:spPr>
           <a:xfrm rot="3910712">
-            <a:off x="565710" y="3032639"/>
-            <a:ext cx="632460" cy="251460"/>
+            <a:off x="527610" y="3032639"/>
+            <a:ext cx="708660" cy="251460"/>
           </a:xfrm>
           <a:prstGeom prst="rect">
             <a:avLst/>
@@ -12677,8 +12677,8 @@
         </p:nvSpPr>
         <p:spPr>
           <a:xfrm rot="4377592">
-            <a:off x="612810" y="3155784"/>
-            <a:ext cx="632460" cy="251460"/>
+            <a:off x="574710" y="3155784"/>
+            <a:ext cx="708660" cy="251460"/>
           </a:xfrm>
           <a:prstGeom prst="rect">
             <a:avLst/>
@@ -12718,8 +12718,8 @@
         </p:nvSpPr>
         <p:spPr>
           <a:xfrm>
-            <a:off x="68610" y="3231743"/>
-            <a:ext cx="628650" cy="744855"/>
+            <a:off x="30510" y="3231743"/>
+            <a:ext cx="704850" cy="744855"/>
           </a:xfrm>
           <a:prstGeom prst="rect">
             <a:avLst/>
@@ -14146,8 +14146,8 @@
         </p:nvSpPr>
         <p:spPr>
           <a:xfrm>
-            <a:off x="247650" y="4770775"/>
-            <a:ext cx="552450" cy="291465"/>
+            <a:off x="209550" y="4770775"/>
+            <a:ext cx="628650" cy="291465"/>
           </a:xfrm>
           <a:prstGeom prst="rect">
             <a:avLst/>
@@ -15018,8 +15018,8 @@
         </p:nvSpPr>
         <p:spPr>
           <a:xfrm rot="1639131">
-            <a:off x="129797" y="2577299"/>
-            <a:ext cx="632460" cy="251460"/>
+            <a:off x="91697" y="2577299"/>
+            <a:ext cx="708660" cy="251460"/>
           </a:xfrm>
           <a:prstGeom prst="rect">
             <a:avLst/>
@@ -15059,8 +15059,8 @@
         </p:nvSpPr>
         <p:spPr>
           <a:xfrm rot="2117479">
-            <a:off x="245209" y="2647485"/>
-            <a:ext cx="632460" cy="251460"/>
+            <a:off x="207109" y="2647485"/>
+            <a:ext cx="708660" cy="251460"/>
           </a:xfrm>
           <a:prstGeom prst="rect">
             <a:avLst/>
@@ -15100,8 +15100,8 @@
         </p:nvSpPr>
         <p:spPr>
           <a:xfrm rot="2572833">
-            <a:off x="345025" y="2728562"/>
-            <a:ext cx="632460" cy="251460"/>
+            <a:off x="306925" y="2728562"/>
+            <a:ext cx="708660" cy="251460"/>
           </a:xfrm>
           <a:prstGeom prst="rect">
             <a:avLst/>
@@ -15141,8 +15141,8 @@
         </p:nvSpPr>
         <p:spPr>
           <a:xfrm rot="3027872">
-            <a:off x="433201" y="2822043"/>
-            <a:ext cx="632460" cy="251460"/>
+            <a:off x="395101" y="2822043"/>
+            <a:ext cx="708660" cy="251460"/>
           </a:xfrm>
           <a:prstGeom prst="rect">
             <a:avLst/>
@@ -15182,8 +15182,8 @@
         </p:nvSpPr>
         <p:spPr>
           <a:xfrm rot="3467149">
-            <a:off x="505903" y="2922569"/>
-            <a:ext cx="632460" cy="251460"/>
+            <a:off x="467803" y="2922569"/>
+            <a:ext cx="708660" cy="251460"/>
           </a:xfrm>
           <a:prstGeom prst="rect">
             <a:avLst/>
@@ -15223,8 +15223,8 @@
         </p:nvSpPr>
         <p:spPr>
           <a:xfrm rot="3910712">
-            <a:off x="565710" y="3032639"/>
-            <a:ext cx="632460" cy="251460"/>
+            <a:off x="527610" y="3032639"/>
+            <a:ext cx="708660" cy="251460"/>
           </a:xfrm>
           <a:prstGeom prst="rect">
             <a:avLst/>
@@ -15264,8 +15264,8 @@
         </p:nvSpPr>
         <p:spPr>
           <a:xfrm rot="4377592">
-            <a:off x="612810" y="3155784"/>
-            <a:ext cx="632460" cy="251460"/>
+            <a:off x="574710" y="3155784"/>
+            <a:ext cx="708660" cy="251460"/>
           </a:xfrm>
           <a:prstGeom prst="rect">
             <a:avLst/>
@@ -15305,8 +15305,8 @@
         </p:nvSpPr>
         <p:spPr>
           <a:xfrm>
-            <a:off x="68610" y="3231743"/>
-            <a:ext cx="624780" cy="744855"/>
+            <a:off x="30510" y="3231743"/>
+            <a:ext cx="700980" cy="744855"/>
           </a:xfrm>
           <a:prstGeom prst="rect">
             <a:avLst/>
@@ -17331,8 +17331,8 @@
         </p:nvSpPr>
         <p:spPr>
           <a:xfrm>
-            <a:off x="247650" y="2101691"/>
-            <a:ext cx="552450" cy="291465"/>
+            <a:off x="209550" y="2101691"/>
+            <a:ext cx="628650" cy="291465"/>
           </a:xfrm>
           <a:prstGeom prst="rect">
             <a:avLst/>
@@ -18203,8 +18203,8 @@
         </p:nvSpPr>
         <p:spPr>
           <a:xfrm rot="1639131">
-            <a:off x="129797" y="2577299"/>
-            <a:ext cx="632460" cy="251460"/>
+            <a:off x="91697" y="2577299"/>
+            <a:ext cx="708660" cy="251460"/>
           </a:xfrm>
           <a:prstGeom prst="rect">
             <a:avLst/>
@@ -18244,8 +18244,8 @@
         </p:nvSpPr>
         <p:spPr>
           <a:xfrm rot="2117479">
-            <a:off x="245209" y="2647485"/>
-            <a:ext cx="632460" cy="251460"/>
+            <a:off x="207109" y="2647485"/>
+            <a:ext cx="708660" cy="251460"/>
           </a:xfrm>
           <a:prstGeom prst="rect">
             <a:avLst/>
@@ -18285,8 +18285,8 @@
         </p:nvSpPr>
         <p:spPr>
           <a:xfrm rot="2572833">
-            <a:off x="345025" y="2728562"/>
-            <a:ext cx="632460" cy="251460"/>
+            <a:off x="306925" y="2728562"/>
+            <a:ext cx="708660" cy="251460"/>
           </a:xfrm>
           <a:prstGeom prst="rect">
             <a:avLst/>
@@ -18326,8 +18326,8 @@
         </p:nvSpPr>
         <p:spPr>
           <a:xfrm rot="3027872">
-            <a:off x="433201" y="2822043"/>
-            <a:ext cx="632460" cy="251460"/>
+            <a:off x="395101" y="2822043"/>
+            <a:ext cx="708660" cy="251460"/>
           </a:xfrm>
           <a:prstGeom prst="rect">
             <a:avLst/>
@@ -18367,8 +18367,8 @@
         </p:nvSpPr>
         <p:spPr>
           <a:xfrm rot="3467149">
-            <a:off x="505903" y="2922569"/>
-            <a:ext cx="632460" cy="251460"/>
+            <a:off x="467803" y="2922569"/>
+            <a:ext cx="708660" cy="251460"/>
           </a:xfrm>
           <a:prstGeom prst="rect">
             <a:avLst/>
@@ -18408,8 +18408,8 @@
         </p:nvSpPr>
         <p:spPr>
           <a:xfrm rot="3910712">
-            <a:off x="565710" y="3032639"/>
-            <a:ext cx="632460" cy="251460"/>
+            <a:off x="527610" y="3032639"/>
+            <a:ext cx="708660" cy="251460"/>
           </a:xfrm>
           <a:prstGeom prst="rect">
             <a:avLst/>
@@ -18449,8 +18449,8 @@
         </p:nvSpPr>
         <p:spPr>
           <a:xfrm rot="4377592">
-            <a:off x="612810" y="3155784"/>
-            <a:ext cx="632460" cy="251460"/>
+            <a:off x="574710" y="3155784"/>
+            <a:ext cx="708660" cy="251460"/>
           </a:xfrm>
           <a:prstGeom prst="rect">
             <a:avLst/>
@@ -18490,8 +18490,8 @@
         </p:nvSpPr>
         <p:spPr>
           <a:xfrm>
-            <a:off x="68610" y="3231743"/>
-            <a:ext cx="624780" cy="744855"/>
+            <a:off x="30510" y="3231743"/>
+            <a:ext cx="700980" cy="744855"/>
           </a:xfrm>
           <a:prstGeom prst="rect">
             <a:avLst/>
@@ -19480,8 +19480,8 @@
         </p:nvSpPr>
         <p:spPr>
           <a:xfrm>
-            <a:off x="5199162" y="813435"/>
-            <a:ext cx="552450" cy="291465"/>
+            <a:off x="5161062" y="813435"/>
+            <a:ext cx="628650" cy="291465"/>
           </a:xfrm>
           <a:prstGeom prst="rect">
             <a:avLst/>
@@ -19568,8 +19568,8 @@
         </p:nvSpPr>
         <p:spPr>
           <a:xfrm>
-            <a:off x="5199162" y="1138178"/>
-            <a:ext cx="552450" cy="291465"/>
+            <a:off x="5161062" y="1138178"/>
+            <a:ext cx="628650" cy="291465"/>
           </a:xfrm>
           <a:prstGeom prst="rect">
             <a:avLst/>
@@ -19656,8 +19656,8 @@
         </p:nvSpPr>
         <p:spPr>
           <a:xfrm>
-            <a:off x="5199162" y="1462921"/>
-            <a:ext cx="552450" cy="291465"/>
+            <a:off x="5161062" y="1462921"/>
+            <a:ext cx="628650" cy="291465"/>
           </a:xfrm>
           <a:prstGeom prst="rect">
             <a:avLst/>
@@ -19744,8 +19744,8 @@
         </p:nvSpPr>
         <p:spPr>
           <a:xfrm>
-            <a:off x="5199162" y="1787664"/>
-            <a:ext cx="552450" cy="291465"/>
+            <a:off x="5161062" y="1787664"/>
+            <a:ext cx="628650" cy="291465"/>
           </a:xfrm>
           <a:prstGeom prst="rect">
             <a:avLst/>
@@ -19832,8 +19832,8 @@
         </p:nvSpPr>
         <p:spPr>
           <a:xfrm>
-            <a:off x="5199162" y="2112407"/>
-            <a:ext cx="552450" cy="291465"/>
+            <a:off x="5161062" y="2112407"/>
+            <a:ext cx="628650" cy="291465"/>
           </a:xfrm>
           <a:prstGeom prst="rect">
             <a:avLst/>
@@ -19920,8 +19920,8 @@
         </p:nvSpPr>
         <p:spPr>
           <a:xfrm>
-            <a:off x="5199162" y="2437150"/>
-            <a:ext cx="552450" cy="291465"/>
+            <a:off x="5161062" y="2437150"/>
+            <a:ext cx="628650" cy="291465"/>
           </a:xfrm>
           <a:prstGeom prst="rect">
             <a:avLst/>
@@ -20008,8 +20008,8 @@
         </p:nvSpPr>
         <p:spPr>
           <a:xfrm>
-            <a:off x="5199162" y="2761893"/>
-            <a:ext cx="552450" cy="291465"/>
+            <a:off x="5161062" y="2761893"/>
+            <a:ext cx="628650" cy="291465"/>
           </a:xfrm>
           <a:prstGeom prst="rect">
             <a:avLst/>
@@ -20096,8 +20096,8 @@
         </p:nvSpPr>
         <p:spPr>
           <a:xfrm>
-            <a:off x="5199162" y="3086636"/>
-            <a:ext cx="552450" cy="291465"/>
+            <a:off x="5161062" y="3086636"/>
+            <a:ext cx="628650" cy="291465"/>
           </a:xfrm>
           <a:prstGeom prst="rect">
             <a:avLst/>
@@ -20184,8 +20184,8 @@
         </p:nvSpPr>
         <p:spPr>
           <a:xfrm>
-            <a:off x="5199162" y="3411379"/>
-            <a:ext cx="552450" cy="291465"/>
+            <a:off x="5161062" y="3411379"/>
+            <a:ext cx="628650" cy="291465"/>
           </a:xfrm>
           <a:prstGeom prst="rect">
             <a:avLst/>
@@ -20272,8 +20272,8 @@
         </p:nvSpPr>
         <p:spPr>
           <a:xfrm>
-            <a:off x="5199162" y="3736122"/>
-            <a:ext cx="552450" cy="291465"/>
+            <a:off x="5161062" y="3736122"/>
+            <a:ext cx="628650" cy="291465"/>
           </a:xfrm>
           <a:prstGeom prst="rect">
             <a:avLst/>
@@ -20360,8 +20360,8 @@
         </p:nvSpPr>
         <p:spPr>
           <a:xfrm>
-            <a:off x="5199162" y="4060865"/>
-            <a:ext cx="552450" cy="291465"/>
+            <a:off x="5161062" y="4060865"/>
+            <a:ext cx="628650" cy="291465"/>
           </a:xfrm>
           <a:prstGeom prst="rect">
             <a:avLst/>
@@ -20448,8 +20448,8 @@
         </p:nvSpPr>
         <p:spPr>
           <a:xfrm>
-            <a:off x="5199162" y="4385608"/>
-            <a:ext cx="552450" cy="291465"/>
+            <a:off x="5161062" y="4385608"/>
+            <a:ext cx="628650" cy="291465"/>
           </a:xfrm>
           <a:prstGeom prst="rect">
             <a:avLst/>
@@ -20536,8 +20536,8 @@
         </p:nvSpPr>
         <p:spPr>
           <a:xfrm>
-            <a:off x="5199162" y="4710351"/>
-            <a:ext cx="552450" cy="291465"/>
+            <a:off x="5161062" y="4710351"/>
+            <a:ext cx="628650" cy="291465"/>
           </a:xfrm>
           <a:prstGeom prst="rect">
             <a:avLst/>
@@ -22530,8 +22530,8 @@
         </p:nvSpPr>
         <p:spPr>
           <a:xfrm>
-            <a:off x="495955" y="2740000"/>
-            <a:ext cx="476250" cy="279295"/>
+            <a:off x="457855" y="2740000"/>
+            <a:ext cx="552450" cy="279295"/>
           </a:xfrm>
           <a:prstGeom prst="rect">
             <a:avLst/>
@@ -22571,8 +22571,8 @@
         </p:nvSpPr>
         <p:spPr>
           <a:xfrm>
-            <a:off x="818346" y="2625418"/>
-            <a:ext cx="1358950" cy="308695"/>
+            <a:off x="1008846" y="2625418"/>
+            <a:ext cx="1662514" cy="308695"/>
           </a:xfrm>
           <a:prstGeom prst="rect">
             <a:avLst/>
@@ -22585,7 +22585,7 @@
           </a:bodyPr>
           <a:lstStyle/>
           <a:p>
-            <a:pPr algn="ctr">
+            <a:pPr algn="l">
               <a:lnSpc>
                 <a:spcPts val="1715"/>
               </a:lnSpc>
@@ -22612,8 +22612,8 @@
         </p:nvSpPr>
         <p:spPr>
           <a:xfrm>
-            <a:off x="808821" y="2866685"/>
-            <a:ext cx="1246796" cy="235196"/>
+            <a:off x="999321" y="2866685"/>
+            <a:ext cx="1471854" cy="235196"/>
           </a:xfrm>
           <a:prstGeom prst="rect">
             <a:avLst/>
@@ -22626,7 +22626,7 @@
           </a:bodyPr>
           <a:lstStyle/>
           <a:p>
-            <a:pPr algn="ctr">
+            <a:pPr algn="l">
               <a:lnSpc>
                 <a:spcPts val="1307"/>
               </a:lnSpc>
@@ -22810,8 +22810,8 @@
         </p:nvSpPr>
         <p:spPr>
           <a:xfrm>
-            <a:off x="495955" y="3379868"/>
-            <a:ext cx="472380" cy="279295"/>
+            <a:off x="457855" y="3379868"/>
+            <a:ext cx="548580" cy="279295"/>
           </a:xfrm>
           <a:prstGeom prst="rect">
             <a:avLst/>
@@ -22851,8 +22851,8 @@
         </p:nvSpPr>
         <p:spPr>
           <a:xfrm>
-            <a:off x="818346" y="3265295"/>
-            <a:ext cx="1106686" cy="308695"/>
+            <a:off x="1008846" y="3265295"/>
+            <a:ext cx="1233666" cy="308695"/>
           </a:xfrm>
           <a:prstGeom prst="rect">
             <a:avLst/>
@@ -22865,7 +22865,7 @@
           </a:bodyPr>
           <a:lstStyle/>
           <a:p>
-            <a:pPr algn="ctr">
+            <a:pPr algn="l">
               <a:lnSpc>
                 <a:spcPts val="1715"/>
               </a:lnSpc>
@@ -22892,8 +22892,8 @@
         </p:nvSpPr>
         <p:spPr>
           <a:xfrm>
-            <a:off x="818346" y="3506562"/>
-            <a:ext cx="972592" cy="235196"/>
+            <a:off x="1008846" y="3506562"/>
+            <a:ext cx="1048792" cy="235196"/>
           </a:xfrm>
           <a:prstGeom prst="rect">
             <a:avLst/>
@@ -22906,7 +22906,7 @@
           </a:bodyPr>
           <a:lstStyle/>
           <a:p>
-            <a:pPr algn="ctr">
+            <a:pPr algn="l">
               <a:lnSpc>
                 <a:spcPts val="1307"/>
               </a:lnSpc>
@@ -23090,8 +23090,8 @@
         </p:nvSpPr>
         <p:spPr>
           <a:xfrm>
-            <a:off x="495955" y="4019745"/>
-            <a:ext cx="472380" cy="279295"/>
+            <a:off x="457855" y="4019745"/>
+            <a:ext cx="548580" cy="279295"/>
           </a:xfrm>
           <a:prstGeom prst="rect">
             <a:avLst/>
@@ -23131,8 +23131,8 @@
         </p:nvSpPr>
         <p:spPr>
           <a:xfrm>
-            <a:off x="818346" y="3905163"/>
-            <a:ext cx="1469529" cy="308695"/>
+            <a:off x="1008846" y="3905163"/>
+            <a:ext cx="1850499" cy="308695"/>
           </a:xfrm>
           <a:prstGeom prst="rect">
             <a:avLst/>
@@ -23145,7 +23145,7 @@
           </a:bodyPr>
           <a:lstStyle/>
           <a:p>
-            <a:pPr algn="ctr">
+            <a:pPr algn="l">
               <a:lnSpc>
                 <a:spcPts val="1715"/>
               </a:lnSpc>
@@ -23172,8 +23172,8 @@
         </p:nvSpPr>
         <p:spPr>
           <a:xfrm>
-            <a:off x="818346" y="4146430"/>
-            <a:ext cx="1253595" cy="235196"/>
+            <a:off x="1008846" y="4146430"/>
+            <a:ext cx="1483411" cy="235196"/>
           </a:xfrm>
           <a:prstGeom prst="rect">
             <a:avLst/>
@@ -23186,7 +23186,7 @@
           </a:bodyPr>
           <a:lstStyle/>
           <a:p>
-            <a:pPr algn="ctr">
+            <a:pPr algn="l">
               <a:lnSpc>
                 <a:spcPts val="1307"/>
               </a:lnSpc>
@@ -23370,8 +23370,8 @@
         </p:nvSpPr>
         <p:spPr>
           <a:xfrm>
-            <a:off x="495955" y="4659613"/>
-            <a:ext cx="476250" cy="279295"/>
+            <a:off x="457855" y="4659613"/>
+            <a:ext cx="552450" cy="279295"/>
           </a:xfrm>
           <a:prstGeom prst="rect">
             <a:avLst/>
@@ -23411,8 +23411,8 @@
         </p:nvSpPr>
         <p:spPr>
           <a:xfrm>
-            <a:off x="818346" y="4545031"/>
-            <a:ext cx="2245667" cy="308695"/>
+            <a:off x="1008846" y="4545031"/>
+            <a:ext cx="3169934" cy="308695"/>
           </a:xfrm>
           <a:prstGeom prst="rect">
             <a:avLst/>
@@ -23425,7 +23425,7 @@
           </a:bodyPr>
           <a:lstStyle/>
           <a:p>
-            <a:pPr algn="ctr">
+            <a:pPr algn="l">
               <a:lnSpc>
                 <a:spcPts val="1715"/>
               </a:lnSpc>
@@ -23452,8 +23452,8 @@
         </p:nvSpPr>
         <p:spPr>
           <a:xfrm>
-            <a:off x="818346" y="4786307"/>
-            <a:ext cx="1471761" cy="235196"/>
+            <a:off x="1008846" y="4786307"/>
+            <a:ext cx="1854294" cy="235196"/>
           </a:xfrm>
           <a:prstGeom prst="rect">
             <a:avLst/>
@@ -23466,7 +23466,7 @@
           </a:bodyPr>
           <a:lstStyle/>
           <a:p>
-            <a:pPr algn="ctr">
+            <a:pPr algn="l">
               <a:lnSpc>
                 <a:spcPts val="1307"/>
               </a:lnSpc>
@@ -23650,8 +23650,8 @@
         </p:nvSpPr>
         <p:spPr>
           <a:xfrm>
-            <a:off x="495955" y="5299481"/>
-            <a:ext cx="476250" cy="279295"/>
+            <a:off x="457855" y="5299481"/>
+            <a:ext cx="552450" cy="279295"/>
           </a:xfrm>
           <a:prstGeom prst="rect">
             <a:avLst/>
@@ -23691,8 +23691,8 @@
         </p:nvSpPr>
         <p:spPr>
           <a:xfrm>
-            <a:off x="818346" y="5184908"/>
-            <a:ext cx="1711672" cy="308695"/>
+            <a:off x="1008846" y="5184908"/>
+            <a:ext cx="2262143" cy="308695"/>
           </a:xfrm>
           <a:prstGeom prst="rect">
             <a:avLst/>
@@ -23705,7 +23705,7 @@
           </a:bodyPr>
           <a:lstStyle/>
           <a:p>
-            <a:pPr algn="ctr">
+            <a:pPr algn="l">
               <a:lnSpc>
                 <a:spcPts val="1715"/>
               </a:lnSpc>
@@ -23732,8 +23732,8 @@
         </p:nvSpPr>
         <p:spPr>
           <a:xfrm>
-            <a:off x="818346" y="5426175"/>
-            <a:ext cx="1794420" cy="235196"/>
+            <a:off x="1008846" y="5426175"/>
+            <a:ext cx="2402815" cy="235196"/>
           </a:xfrm>
           <a:prstGeom prst="rect">
             <a:avLst/>
@@ -23746,7 +23746,7 @@
           </a:bodyPr>
           <a:lstStyle/>
           <a:p>
-            <a:pPr algn="ctr">
+            <a:pPr algn="l">
               <a:lnSpc>
                 <a:spcPts val="1307"/>
               </a:lnSpc>
@@ -24974,8 +24974,8 @@
         </p:nvSpPr>
         <p:spPr>
           <a:xfrm>
-            <a:off x="537528" y="3051006"/>
-            <a:ext cx="1324292" cy="209063"/>
+            <a:off x="728028" y="3051006"/>
+            <a:ext cx="1603596" cy="209063"/>
           </a:xfrm>
           <a:prstGeom prst="rect">
             <a:avLst/>
@@ -24988,7 +24988,7 @@
           </a:bodyPr>
           <a:lstStyle/>
           <a:p>
-            <a:pPr algn="ctr">
+            <a:pPr algn="l">
               <a:lnSpc>
                 <a:spcPts val="1162"/>
               </a:lnSpc>
@@ -25015,8 +25015,8 @@
         </p:nvSpPr>
         <p:spPr>
           <a:xfrm>
-            <a:off x="440902" y="3315618"/>
-            <a:ext cx="2679948" cy="283729"/>
+            <a:off x="631402" y="3315618"/>
+            <a:ext cx="3908212" cy="283729"/>
           </a:xfrm>
           <a:prstGeom prst="rect">
             <a:avLst/>
@@ -25029,7 +25029,7 @@
           </a:bodyPr>
           <a:lstStyle/>
           <a:p>
-            <a:pPr algn="ctr">
+            <a:pPr algn="l">
               <a:lnSpc>
                 <a:spcPts val="1577"/>
               </a:lnSpc>
@@ -25102,8 +25102,8 @@
         </p:nvSpPr>
         <p:spPr>
           <a:xfrm>
-            <a:off x="1733757" y="3723944"/>
-            <a:ext cx="1273820" cy="223996"/>
+            <a:off x="1611770" y="3723944"/>
+            <a:ext cx="1517794" cy="223996"/>
           </a:xfrm>
           <a:prstGeom prst="rect">
             <a:avLst/>
@@ -25239,8 +25239,8 @@
         </p:nvSpPr>
         <p:spPr>
           <a:xfrm>
-            <a:off x="3348461" y="3051006"/>
-            <a:ext cx="996553" cy="209063"/>
+            <a:off x="3538961" y="3051006"/>
+            <a:ext cx="1072753" cy="209063"/>
           </a:xfrm>
           <a:prstGeom prst="rect">
             <a:avLst/>
@@ -25253,7 +25253,7 @@
           </a:bodyPr>
           <a:lstStyle/>
           <a:p>
-            <a:pPr algn="ctr">
+            <a:pPr algn="l">
               <a:lnSpc>
                 <a:spcPts val="1162"/>
               </a:lnSpc>
@@ -25280,8 +25280,8 @@
         </p:nvSpPr>
         <p:spPr>
           <a:xfrm>
-            <a:off x="3251835" y="3315618"/>
-            <a:ext cx="2053977" cy="283729"/>
+            <a:off x="3442335" y="3315618"/>
+            <a:ext cx="2844061" cy="283729"/>
           </a:xfrm>
           <a:prstGeom prst="rect">
             <a:avLst/>
@@ -25294,7 +25294,7 @@
           </a:bodyPr>
           <a:lstStyle/>
           <a:p>
-            <a:pPr algn="ctr">
+            <a:pPr algn="l">
               <a:lnSpc>
                 <a:spcPts val="1577"/>
               </a:lnSpc>
@@ -25367,8 +25367,8 @@
         </p:nvSpPr>
         <p:spPr>
           <a:xfrm>
-            <a:off x="4508078" y="3723944"/>
-            <a:ext cx="1347043" cy="223996"/>
+            <a:off x="4360463" y="3723944"/>
+            <a:ext cx="1642274" cy="223996"/>
           </a:xfrm>
           <a:prstGeom prst="rect">
             <a:avLst/>
@@ -25504,8 +25504,8 @@
         </p:nvSpPr>
         <p:spPr>
           <a:xfrm>
-            <a:off x="537528" y="4386199"/>
-            <a:ext cx="627757" cy="209063"/>
+            <a:off x="728028" y="4386199"/>
+            <a:ext cx="703957" cy="209063"/>
           </a:xfrm>
           <a:prstGeom prst="rect">
             <a:avLst/>
@@ -25518,7 +25518,7 @@
           </a:bodyPr>
           <a:lstStyle/>
           <a:p>
-            <a:pPr algn="ctr">
+            <a:pPr algn="l">
               <a:lnSpc>
                 <a:spcPts val="1162"/>
               </a:lnSpc>
@@ -25545,8 +25545,8 @@
         </p:nvSpPr>
         <p:spPr>
           <a:xfrm>
-            <a:off x="440902" y="4650811"/>
-            <a:ext cx="1386632" cy="283729"/>
+            <a:off x="631402" y="4650811"/>
+            <a:ext cx="1709574" cy="283729"/>
           </a:xfrm>
           <a:prstGeom prst="rect">
             <a:avLst/>
@@ -25559,7 +25559,7 @@
           </a:bodyPr>
           <a:lstStyle/>
           <a:p>
-            <a:pPr algn="ctr">
+            <a:pPr algn="l">
               <a:lnSpc>
                 <a:spcPts val="1577"/>
               </a:lnSpc>
@@ -25632,8 +25632,8 @@
         </p:nvSpPr>
         <p:spPr>
           <a:xfrm>
-            <a:off x="1697145" y="5059133"/>
-            <a:ext cx="1347043" cy="223996"/>
+            <a:off x="1549530" y="5059133"/>
+            <a:ext cx="1642274" cy="223996"/>
           </a:xfrm>
           <a:prstGeom prst="rect">
             <a:avLst/>
@@ -25769,8 +25769,8 @@
         </p:nvSpPr>
         <p:spPr>
           <a:xfrm>
-            <a:off x="3348461" y="4386199"/>
-            <a:ext cx="626864" cy="209063"/>
+            <a:off x="3538961" y="4386199"/>
+            <a:ext cx="703064" cy="209063"/>
           </a:xfrm>
           <a:prstGeom prst="rect">
             <a:avLst/>
@@ -25783,7 +25783,7 @@
           </a:bodyPr>
           <a:lstStyle/>
           <a:p>
-            <a:pPr algn="ctr">
+            <a:pPr algn="l">
               <a:lnSpc>
                 <a:spcPts val="1162"/>
               </a:lnSpc>
@@ -25810,8 +25810,8 @@
         </p:nvSpPr>
         <p:spPr>
           <a:xfrm>
-            <a:off x="3251835" y="4650811"/>
-            <a:ext cx="2327375" cy="283729"/>
+            <a:off x="3442335" y="4650811"/>
+            <a:ext cx="3308837" cy="283729"/>
           </a:xfrm>
           <a:prstGeom prst="rect">
             <a:avLst/>
@@ -25824,7 +25824,7 @@
           </a:bodyPr>
           <a:lstStyle/>
           <a:p>
-            <a:pPr algn="ctr">
+            <a:pPr algn="l">
               <a:lnSpc>
                 <a:spcPts val="1577"/>
               </a:lnSpc>
@@ -25897,8 +25897,8 @@
         </p:nvSpPr>
         <p:spPr>
           <a:xfrm>
-            <a:off x="4544690" y="5059133"/>
-            <a:ext cx="1273820" cy="223996"/>
+            <a:off x="4422703" y="5059133"/>
+            <a:ext cx="1517794" cy="223996"/>
           </a:xfrm>
           <a:prstGeom prst="rect">
             <a:avLst/>
@@ -26380,7 +26380,7 @@
             <a:r>
               <a:rPr sz="1125" b="0">
                 <a:solidFill>
-                  <a:srgbClr val="6B7280"/>
+                  <a:srgbClr val="55606F"/>
                 </a:solidFill>
                 <a:latin typeface="맑은 고딕"/>
                 <a:ea typeface="맑은 고딕"/>
@@ -27350,8 +27350,8 @@
         </p:nvSpPr>
         <p:spPr>
           <a:xfrm>
-            <a:off x="2259868" y="3474430"/>
-            <a:ext cx="760214" cy="321058"/>
+            <a:off x="2221768" y="3474430"/>
+            <a:ext cx="836414" cy="321058"/>
           </a:xfrm>
           <a:prstGeom prst="rect">
             <a:avLst/>
@@ -27391,8 +27391,8 @@
         </p:nvSpPr>
         <p:spPr>
           <a:xfrm>
-            <a:off x="2061182" y="3773483"/>
-            <a:ext cx="1155799" cy="237304"/>
+            <a:off x="1980503" y="3773483"/>
+            <a:ext cx="1317159" cy="237304"/>
           </a:xfrm>
           <a:prstGeom prst="rect">
             <a:avLst/>
@@ -27625,8 +27625,8 @@
         </p:nvSpPr>
         <p:spPr>
           <a:xfrm>
-            <a:off x="4116855" y="3474430"/>
-            <a:ext cx="1501824" cy="321058"/>
+            <a:off x="3915067" y="3474430"/>
+            <a:ext cx="1905401" cy="321058"/>
           </a:xfrm>
           <a:prstGeom prst="rect">
             <a:avLst/>
@@ -27666,8 +27666,8 @@
         </p:nvSpPr>
         <p:spPr>
           <a:xfrm>
-            <a:off x="4174527" y="3773483"/>
-            <a:ext cx="1399331" cy="237304"/>
+            <a:off x="4008611" y="3773483"/>
+            <a:ext cx="1731162" cy="237304"/>
           </a:xfrm>
           <a:prstGeom prst="rect">
             <a:avLst/>
@@ -27900,8 +27900,8 @@
         </p:nvSpPr>
         <p:spPr>
           <a:xfrm>
-            <a:off x="6454186" y="3474430"/>
-            <a:ext cx="1303586" cy="321058"/>
+            <a:off x="6321781" y="3474430"/>
+            <a:ext cx="1568395" cy="321058"/>
           </a:xfrm>
           <a:prstGeom prst="rect">
             <a:avLst/>
@@ -27941,8 +27941,8 @@
         </p:nvSpPr>
         <p:spPr>
           <a:xfrm>
-            <a:off x="6318901" y="3773483"/>
-            <a:ext cx="1574155" cy="237304"/>
+            <a:off x="6091797" y="3773483"/>
+            <a:ext cx="2028364" cy="237304"/>
           </a:xfrm>
           <a:prstGeom prst="rect">
             <a:avLst/>
@@ -28175,8 +28175,8 @@
         </p:nvSpPr>
         <p:spPr>
           <a:xfrm>
-            <a:off x="8498920" y="3474430"/>
-            <a:ext cx="1681015" cy="321058"/>
+            <a:off x="8234414" y="3474430"/>
+            <a:ext cx="2210025" cy="321058"/>
           </a:xfrm>
           <a:prstGeom prst="rect">
             <a:avLst/>
@@ -28216,8 +28216,8 @@
         </p:nvSpPr>
         <p:spPr>
           <a:xfrm>
-            <a:off x="8641423" y="3773483"/>
-            <a:ext cx="1399330" cy="237304"/>
+            <a:off x="8475508" y="3773483"/>
+            <a:ext cx="1731161" cy="237304"/>
           </a:xfrm>
           <a:prstGeom prst="rect">
             <a:avLst/>
@@ -28301,8 +28301,8 @@
         </p:nvSpPr>
         <p:spPr>
           <a:xfrm>
-            <a:off x="247650" y="4381202"/>
-            <a:ext cx="647700" cy="266700"/>
+            <a:off x="209550" y="4381202"/>
+            <a:ext cx="723900" cy="266700"/>
           </a:xfrm>
           <a:prstGeom prst="rect">
             <a:avLst/>
@@ -28455,8 +28455,8 @@
         </p:nvSpPr>
         <p:spPr>
           <a:xfrm>
-            <a:off x="247650" y="4668143"/>
-            <a:ext cx="647700" cy="266700"/>
+            <a:off x="209550" y="4668143"/>
+            <a:ext cx="723900" cy="266700"/>
           </a:xfrm>
           <a:prstGeom prst="rect">
             <a:avLst/>
@@ -28609,8 +28609,8 @@
         </p:nvSpPr>
         <p:spPr>
           <a:xfrm>
-            <a:off x="247650" y="4955084"/>
-            <a:ext cx="647700" cy="266700"/>
+            <a:off x="209550" y="4955084"/>
+            <a:ext cx="723900" cy="266700"/>
           </a:xfrm>
           <a:prstGeom prst="rect">
             <a:avLst/>
@@ -28785,8 +28785,8 @@
         </p:nvSpPr>
         <p:spPr>
           <a:xfrm>
-            <a:off x="247650" y="5471815"/>
-            <a:ext cx="647700" cy="266700"/>
+            <a:off x="209550" y="5471815"/>
+            <a:ext cx="723900" cy="266700"/>
           </a:xfrm>
           <a:prstGeom prst="rect">
             <a:avLst/>
@@ -28939,8 +28939,8 @@
         </p:nvSpPr>
         <p:spPr>
           <a:xfrm>
-            <a:off x="247650" y="5758755"/>
-            <a:ext cx="647700" cy="266700"/>
+            <a:off x="209550" y="5758755"/>
+            <a:ext cx="723900" cy="266700"/>
           </a:xfrm>
           <a:prstGeom prst="rect">
             <a:avLst/>
@@ -29974,8 +29974,8 @@
         </p:nvSpPr>
         <p:spPr>
           <a:xfrm rot="1639131">
-            <a:off x="129797" y="2577299"/>
-            <a:ext cx="632460" cy="251460"/>
+            <a:off x="91697" y="2577299"/>
+            <a:ext cx="708660" cy="251460"/>
           </a:xfrm>
           <a:prstGeom prst="rect">
             <a:avLst/>
@@ -30015,8 +30015,8 @@
         </p:nvSpPr>
         <p:spPr>
           <a:xfrm rot="2117479">
-            <a:off x="245209" y="2647485"/>
-            <a:ext cx="632460" cy="251460"/>
+            <a:off x="207109" y="2647485"/>
+            <a:ext cx="708660" cy="251460"/>
           </a:xfrm>
           <a:prstGeom prst="rect">
             <a:avLst/>
@@ -30056,8 +30056,8 @@
         </p:nvSpPr>
         <p:spPr>
           <a:xfrm rot="2572833">
-            <a:off x="345025" y="2728562"/>
-            <a:ext cx="632460" cy="251460"/>
+            <a:off x="306925" y="2728562"/>
+            <a:ext cx="708660" cy="251460"/>
           </a:xfrm>
           <a:prstGeom prst="rect">
             <a:avLst/>
@@ -30097,8 +30097,8 @@
         </p:nvSpPr>
         <p:spPr>
           <a:xfrm rot="3027872">
-            <a:off x="433201" y="2822043"/>
-            <a:ext cx="632460" cy="251460"/>
+            <a:off x="395101" y="2822043"/>
+            <a:ext cx="708660" cy="251460"/>
           </a:xfrm>
           <a:prstGeom prst="rect">
             <a:avLst/>
@@ -30138,8 +30138,8 @@
         </p:nvSpPr>
         <p:spPr>
           <a:xfrm rot="3467149">
-            <a:off x="505903" y="2922569"/>
-            <a:ext cx="632460" cy="251460"/>
+            <a:off x="467803" y="2922569"/>
+            <a:ext cx="708660" cy="251460"/>
           </a:xfrm>
           <a:prstGeom prst="rect">
             <a:avLst/>
@@ -30179,8 +30179,8 @@
         </p:nvSpPr>
         <p:spPr>
           <a:xfrm rot="3910712">
-            <a:off x="565710" y="3032639"/>
-            <a:ext cx="632460" cy="251460"/>
+            <a:off x="527610" y="3032639"/>
+            <a:ext cx="708660" cy="251460"/>
           </a:xfrm>
           <a:prstGeom prst="rect">
             <a:avLst/>
@@ -30220,8 +30220,8 @@
         </p:nvSpPr>
         <p:spPr>
           <a:xfrm rot="4377592">
-            <a:off x="612810" y="3155784"/>
-            <a:ext cx="632460" cy="251460"/>
+            <a:off x="574710" y="3155784"/>
+            <a:ext cx="708660" cy="251460"/>
           </a:xfrm>
           <a:prstGeom prst="rect">
             <a:avLst/>
@@ -30261,8 +30261,8 @@
         </p:nvSpPr>
         <p:spPr>
           <a:xfrm>
-            <a:off x="68610" y="3231743"/>
-            <a:ext cx="624780" cy="744855"/>
+            <a:off x="30510" y="3231743"/>
+            <a:ext cx="700980" cy="744855"/>
           </a:xfrm>
           <a:prstGeom prst="rect">
             <a:avLst/>
@@ -32621,8 +32621,8 @@
         </p:nvSpPr>
         <p:spPr>
           <a:xfrm rot="1639131">
-            <a:off x="129797" y="2577299"/>
-            <a:ext cx="632460" cy="251460"/>
+            <a:off x="91697" y="2577299"/>
+            <a:ext cx="708660" cy="251460"/>
           </a:xfrm>
           <a:prstGeom prst="rect">
             <a:avLst/>
@@ -32662,8 +32662,8 @@
         </p:nvSpPr>
         <p:spPr>
           <a:xfrm rot="2117479">
-            <a:off x="245209" y="2647485"/>
-            <a:ext cx="632460" cy="251460"/>
+            <a:off x="207109" y="2647485"/>
+            <a:ext cx="708660" cy="251460"/>
           </a:xfrm>
           <a:prstGeom prst="rect">
             <a:avLst/>
@@ -32703,8 +32703,8 @@
         </p:nvSpPr>
         <p:spPr>
           <a:xfrm rot="2572833">
-            <a:off x="345025" y="2728562"/>
-            <a:ext cx="632460" cy="251460"/>
+            <a:off x="306925" y="2728562"/>
+            <a:ext cx="708660" cy="251460"/>
           </a:xfrm>
           <a:prstGeom prst="rect">
             <a:avLst/>
@@ -32744,8 +32744,8 @@
         </p:nvSpPr>
         <p:spPr>
           <a:xfrm rot="3027872">
-            <a:off x="433201" y="2822043"/>
-            <a:ext cx="632460" cy="251460"/>
+            <a:off x="395101" y="2822043"/>
+            <a:ext cx="708660" cy="251460"/>
           </a:xfrm>
           <a:prstGeom prst="rect">
             <a:avLst/>
@@ -32785,8 +32785,8 @@
         </p:nvSpPr>
         <p:spPr>
           <a:xfrm rot="3467149">
-            <a:off x="505903" y="2922569"/>
-            <a:ext cx="632460" cy="251460"/>
+            <a:off x="467803" y="2922569"/>
+            <a:ext cx="708660" cy="251460"/>
           </a:xfrm>
           <a:prstGeom prst="rect">
             <a:avLst/>
@@ -32826,8 +32826,8 @@
         </p:nvSpPr>
         <p:spPr>
           <a:xfrm rot="3910712">
-            <a:off x="565710" y="3032639"/>
-            <a:ext cx="632460" cy="251460"/>
+            <a:off x="527610" y="3032639"/>
+            <a:ext cx="708660" cy="251460"/>
           </a:xfrm>
           <a:prstGeom prst="rect">
             <a:avLst/>
@@ -32867,8 +32867,8 @@
         </p:nvSpPr>
         <p:spPr>
           <a:xfrm rot="4377592">
-            <a:off x="612810" y="3155784"/>
-            <a:ext cx="632460" cy="251460"/>
+            <a:off x="574710" y="3155784"/>
+            <a:ext cx="708660" cy="251460"/>
           </a:xfrm>
           <a:prstGeom prst="rect">
             <a:avLst/>
@@ -32908,8 +32908,8 @@
         </p:nvSpPr>
         <p:spPr>
           <a:xfrm>
-            <a:off x="68610" y="3231743"/>
-            <a:ext cx="624780" cy="744855"/>
+            <a:off x="30510" y="3231743"/>
+            <a:ext cx="700980" cy="744855"/>
           </a:xfrm>
           <a:prstGeom prst="rect">
             <a:avLst/>
@@ -34148,8 +34148,8 @@
         </p:nvSpPr>
         <p:spPr>
           <a:xfrm>
-            <a:off x="8780190" y="3666660"/>
-            <a:ext cx="1251077" cy="342710"/>
+            <a:off x="8666163" y="3666660"/>
+            <a:ext cx="1479131" cy="342710"/>
           </a:xfrm>
           <a:prstGeom prst="rect">
             <a:avLst/>
@@ -34358,8 +34358,8 @@
         </p:nvSpPr>
         <p:spPr>
           <a:xfrm>
-            <a:off x="8336831" y="4709075"/>
-            <a:ext cx="2133440" cy="285592"/>
+            <a:off x="7913977" y="4709075"/>
+            <a:ext cx="2979147" cy="285592"/>
           </a:xfrm>
           <a:prstGeom prst="rect">
             <a:avLst/>
@@ -34447,8 +34447,8 @@
         </p:nvSpPr>
         <p:spPr>
           <a:xfrm>
-            <a:off x="7324453" y="5313581"/>
-            <a:ext cx="1063526" cy="228473"/>
+            <a:off x="7276069" y="5313581"/>
+            <a:ext cx="1160294" cy="228473"/>
           </a:xfrm>
           <a:prstGeom prst="rect">
             <a:avLst/>
@@ -34536,8 +34536,8 @@
         </p:nvSpPr>
         <p:spPr>
           <a:xfrm>
-            <a:off x="9051727" y="5313581"/>
-            <a:ext cx="700088" cy="228473"/>
+            <a:off x="9013627" y="5313581"/>
+            <a:ext cx="776288" cy="228473"/>
           </a:xfrm>
           <a:prstGeom prst="rect">
             <a:avLst/>
@@ -34625,8 +34625,8 @@
         </p:nvSpPr>
         <p:spPr>
           <a:xfrm>
-            <a:off x="10517509" y="5313581"/>
-            <a:ext cx="862012" cy="228473"/>
+            <a:off x="10479409" y="5313581"/>
+            <a:ext cx="938212" cy="228473"/>
           </a:xfrm>
           <a:prstGeom prst="rect">
             <a:avLst/>
@@ -35517,8 +35517,8 @@
         </p:nvSpPr>
         <p:spPr>
           <a:xfrm>
-            <a:off x="1670298" y="3559656"/>
-            <a:ext cx="686098" cy="259586"/>
+            <a:off x="1632198" y="3559656"/>
+            <a:ext cx="762298" cy="259586"/>
           </a:xfrm>
           <a:prstGeom prst="rect">
             <a:avLst/>
@@ -35558,8 +35558,8 @@
         </p:nvSpPr>
         <p:spPr>
           <a:xfrm>
-            <a:off x="2160389" y="3421886"/>
-            <a:ext cx="3354884" cy="300573"/>
+            <a:off x="2350889" y="3421886"/>
+            <a:ext cx="5055602" cy="300573"/>
           </a:xfrm>
           <a:prstGeom prst="rect">
             <a:avLst/>
@@ -35572,7 +35572,7 @@
           </a:bodyPr>
           <a:lstStyle/>
           <a:p>
-            <a:pPr algn="ctr">
+            <a:pPr algn="l">
               <a:lnSpc>
                 <a:spcPts val="1670"/>
               </a:lnSpc>
@@ -35599,8 +35599,8 @@
         </p:nvSpPr>
         <p:spPr>
           <a:xfrm>
-            <a:off x="2160389" y="3662988"/>
-            <a:ext cx="3904506" cy="300573"/>
+            <a:off x="2350889" y="3662988"/>
+            <a:ext cx="5989960" cy="300573"/>
           </a:xfrm>
           <a:prstGeom prst="rect">
             <a:avLst/>
@@ -35613,7 +35613,7 @@
           </a:bodyPr>
           <a:lstStyle/>
           <a:p>
-            <a:pPr algn="ctr">
+            <a:pPr algn="l">
               <a:lnSpc>
                 <a:spcPts val="1670"/>
               </a:lnSpc>
@@ -35778,8 +35778,8 @@
         </p:nvSpPr>
         <p:spPr>
           <a:xfrm>
-            <a:off x="1670298" y="4331181"/>
-            <a:ext cx="686098" cy="259586"/>
+            <a:off x="1632198" y="4331181"/>
+            <a:ext cx="762298" cy="259586"/>
           </a:xfrm>
           <a:prstGeom prst="rect">
             <a:avLst/>
@@ -35819,8 +35819,8 @@
         </p:nvSpPr>
         <p:spPr>
           <a:xfrm>
-            <a:off x="2160389" y="4193411"/>
-            <a:ext cx="3452961" cy="300573"/>
+            <a:off x="2350889" y="4193411"/>
+            <a:ext cx="5222334" cy="300573"/>
           </a:xfrm>
           <a:prstGeom prst="rect">
             <a:avLst/>
@@ -35833,7 +35833,7 @@
           </a:bodyPr>
           <a:lstStyle/>
           <a:p>
-            <a:pPr algn="ctr">
+            <a:pPr algn="l">
               <a:lnSpc>
                 <a:spcPts val="1670"/>
               </a:lnSpc>
@@ -35860,8 +35860,8 @@
         </p:nvSpPr>
         <p:spPr>
           <a:xfrm>
-            <a:off x="2160389" y="4434513"/>
-            <a:ext cx="4032052" cy="300573"/>
+            <a:off x="2350889" y="4434513"/>
+            <a:ext cx="6206788" cy="300573"/>
           </a:xfrm>
           <a:prstGeom prst="rect">
             <a:avLst/>
@@ -35874,7 +35874,7 @@
           </a:bodyPr>
           <a:lstStyle/>
           <a:p>
-            <a:pPr algn="ctr">
+            <a:pPr algn="l">
               <a:lnSpc>
                 <a:spcPts val="1670"/>
               </a:lnSpc>
@@ -36039,8 +36039,8 @@
         </p:nvSpPr>
         <p:spPr>
           <a:xfrm>
-            <a:off x="1660773" y="5102706"/>
-            <a:ext cx="695623" cy="259586"/>
+            <a:off x="1622673" y="5102706"/>
+            <a:ext cx="771823" cy="259586"/>
           </a:xfrm>
           <a:prstGeom prst="rect">
             <a:avLst/>
@@ -36080,8 +36080,8 @@
         </p:nvSpPr>
         <p:spPr>
           <a:xfrm>
-            <a:off x="2160389" y="4964936"/>
-            <a:ext cx="3982938" cy="300573"/>
+            <a:off x="2350889" y="4964936"/>
+            <a:ext cx="6123295" cy="300573"/>
           </a:xfrm>
           <a:prstGeom prst="rect">
             <a:avLst/>
@@ -36094,7 +36094,7 @@
           </a:bodyPr>
           <a:lstStyle/>
           <a:p>
-            <a:pPr algn="ctr">
+            <a:pPr algn="l">
               <a:lnSpc>
                 <a:spcPts val="1670"/>
               </a:lnSpc>
@@ -36121,8 +36121,8 @@
         </p:nvSpPr>
         <p:spPr>
           <a:xfrm>
-            <a:off x="2160389" y="5206038"/>
-            <a:ext cx="4032052" cy="300573"/>
+            <a:off x="2350889" y="5206038"/>
+            <a:ext cx="6206788" cy="300573"/>
           </a:xfrm>
           <a:prstGeom prst="rect">
             <a:avLst/>
@@ -36135,7 +36135,7 @@
           </a:bodyPr>
           <a:lstStyle/>
           <a:p>
-            <a:pPr algn="ctr">
+            <a:pPr algn="l">
               <a:lnSpc>
                 <a:spcPts val="1670"/>
               </a:lnSpc>
@@ -36300,8 +36300,8 @@
         </p:nvSpPr>
         <p:spPr>
           <a:xfrm>
-            <a:off x="1670298" y="5874231"/>
-            <a:ext cx="686098" cy="259586"/>
+            <a:off x="1632198" y="5874231"/>
+            <a:ext cx="762298" cy="259586"/>
           </a:xfrm>
           <a:prstGeom prst="rect">
             <a:avLst/>
@@ -36341,8 +36341,8 @@
         </p:nvSpPr>
         <p:spPr>
           <a:xfrm>
-            <a:off x="2150864" y="5736461"/>
-            <a:ext cx="3815804" cy="300573"/>
+            <a:off x="2341364" y="5736461"/>
+            <a:ext cx="5839167" cy="300573"/>
           </a:xfrm>
           <a:prstGeom prst="rect">
             <a:avLst/>
@@ -36355,7 +36355,7 @@
           </a:bodyPr>
           <a:lstStyle/>
           <a:p>
-            <a:pPr algn="ctr">
+            <a:pPr algn="l">
               <a:lnSpc>
                 <a:spcPts val="1670"/>
               </a:lnSpc>
@@ -36382,8 +36382,8 @@
         </p:nvSpPr>
         <p:spPr>
           <a:xfrm>
-            <a:off x="2160389" y="5977563"/>
-            <a:ext cx="3727847" cy="300573"/>
+            <a:off x="2350889" y="5977563"/>
+            <a:ext cx="5689640" cy="300573"/>
           </a:xfrm>
           <a:prstGeom prst="rect">
             <a:avLst/>
@@ -36396,7 +36396,7 @@
           </a:bodyPr>
           <a:lstStyle/>
           <a:p>
-            <a:pPr algn="ctr">
+            <a:pPr algn="l">
               <a:lnSpc>
                 <a:spcPts val="1670"/>
               </a:lnSpc>
@@ -37274,8 +37274,8 @@
         </p:nvSpPr>
         <p:spPr>
           <a:xfrm>
-            <a:off x="1349641" y="4454780"/>
-            <a:ext cx="976164" cy="337486"/>
+            <a:off x="1311541" y="4454780"/>
+            <a:ext cx="1052364" cy="337486"/>
           </a:xfrm>
           <a:prstGeom prst="rect">
             <a:avLst/>
@@ -37339,8 +37339,8 @@
         </p:nvSpPr>
         <p:spPr>
           <a:xfrm>
-            <a:off x="694649" y="5549918"/>
-            <a:ext cx="2286149" cy="320611"/>
+            <a:off x="218347" y="5549918"/>
+            <a:ext cx="3238753" cy="320611"/>
           </a:xfrm>
           <a:prstGeom prst="rect">
             <a:avLst/>
@@ -37380,8 +37380,8 @@
         </p:nvSpPr>
         <p:spPr>
           <a:xfrm>
-            <a:off x="788857" y="5807995"/>
-            <a:ext cx="2097732" cy="320611"/>
+            <a:off x="378501" y="5807995"/>
+            <a:ext cx="2918445" cy="320611"/>
           </a:xfrm>
           <a:prstGeom prst="rect">
             <a:avLst/>
@@ -37559,8 +37559,8 @@
         </p:nvSpPr>
         <p:spPr>
           <a:xfrm>
-            <a:off x="4178566" y="4117293"/>
-            <a:ext cx="976164" cy="337486"/>
+            <a:off x="4140466" y="4117293"/>
+            <a:ext cx="1052364" cy="337486"/>
           </a:xfrm>
           <a:prstGeom prst="rect">
             <a:avLst/>
@@ -37624,8 +37624,8 @@
         </p:nvSpPr>
         <p:spPr>
           <a:xfrm>
-            <a:off x="3602081" y="5212431"/>
-            <a:ext cx="2129135" cy="320611"/>
+            <a:off x="3180733" y="5212431"/>
+            <a:ext cx="2971830" cy="320611"/>
           </a:xfrm>
           <a:prstGeom prst="rect">
             <a:avLst/>
@@ -37665,8 +37665,8 @@
         </p:nvSpPr>
         <p:spPr>
           <a:xfrm>
-            <a:off x="3832318" y="5470511"/>
-            <a:ext cx="1668661" cy="320611"/>
+            <a:off x="3572137" y="5470511"/>
+            <a:ext cx="2189024" cy="320611"/>
           </a:xfrm>
           <a:prstGeom prst="rect">
             <a:avLst/>
@@ -37844,8 +37844,8 @@
         </p:nvSpPr>
         <p:spPr>
           <a:xfrm>
-            <a:off x="6997967" y="3779807"/>
-            <a:ext cx="985688" cy="337486"/>
+            <a:off x="6959867" y="3779807"/>
+            <a:ext cx="1061888" cy="337486"/>
           </a:xfrm>
           <a:prstGeom prst="rect">
             <a:avLst/>
@@ -37909,8 +37909,8 @@
         </p:nvSpPr>
         <p:spPr>
           <a:xfrm>
-            <a:off x="6069875" y="4874950"/>
-            <a:ext cx="2856191" cy="320611"/>
+            <a:off x="5394058" y="4874950"/>
+            <a:ext cx="4207824" cy="320611"/>
           </a:xfrm>
           <a:prstGeom prst="rect">
             <a:avLst/>
@@ -37950,8 +37950,8 @@
         </p:nvSpPr>
         <p:spPr>
           <a:xfrm>
-            <a:off x="6069875" y="5133027"/>
-            <a:ext cx="2851398" cy="320611"/>
+            <a:off x="5395736" y="5133027"/>
+            <a:ext cx="4199677" cy="320611"/>
           </a:xfrm>
           <a:prstGeom prst="rect">
             <a:avLst/>
@@ -38129,8 +38129,8 @@
         </p:nvSpPr>
         <p:spPr>
           <a:xfrm>
-            <a:off x="9836417" y="3442320"/>
-            <a:ext cx="976163" cy="337486"/>
+            <a:off x="9798317" y="3442320"/>
+            <a:ext cx="1052363" cy="337486"/>
           </a:xfrm>
           <a:prstGeom prst="rect">
             <a:avLst/>
@@ -38194,8 +38194,8 @@
         </p:nvSpPr>
         <p:spPr>
           <a:xfrm>
-            <a:off x="8924919" y="4537463"/>
-            <a:ext cx="2799160" cy="320611"/>
+            <a:off x="8269063" y="4537463"/>
+            <a:ext cx="4110872" cy="320611"/>
           </a:xfrm>
           <a:prstGeom prst="rect">
             <a:avLst/>
@@ -38235,8 +38235,8 @@
         </p:nvSpPr>
         <p:spPr>
           <a:xfrm>
-            <a:off x="9490168" y="4795541"/>
-            <a:ext cx="1668660" cy="320611"/>
+            <a:off x="9229987" y="4795541"/>
+            <a:ext cx="2189022" cy="320611"/>
           </a:xfrm>
           <a:prstGeom prst="rect">
             <a:avLst/>
@@ -38827,8 +38827,8 @@
         </p:nvSpPr>
         <p:spPr>
           <a:xfrm rot="1639131">
-            <a:off x="129797" y="2577299"/>
-            <a:ext cx="632460" cy="251460"/>
+            <a:off x="91697" y="2577299"/>
+            <a:ext cx="708660" cy="251460"/>
           </a:xfrm>
           <a:prstGeom prst="rect">
             <a:avLst/>
@@ -38868,8 +38868,8 @@
         </p:nvSpPr>
         <p:spPr>
           <a:xfrm rot="2117479">
-            <a:off x="245209" y="2647485"/>
-            <a:ext cx="632460" cy="251460"/>
+            <a:off x="207109" y="2647485"/>
+            <a:ext cx="708660" cy="251460"/>
           </a:xfrm>
           <a:prstGeom prst="rect">
             <a:avLst/>
@@ -38909,8 +38909,8 @@
         </p:nvSpPr>
         <p:spPr>
           <a:xfrm rot="2572833">
-            <a:off x="345025" y="2728562"/>
-            <a:ext cx="632460" cy="251460"/>
+            <a:off x="306925" y="2728562"/>
+            <a:ext cx="708660" cy="251460"/>
           </a:xfrm>
           <a:prstGeom prst="rect">
             <a:avLst/>
@@ -38950,8 +38950,8 @@
         </p:nvSpPr>
         <p:spPr>
           <a:xfrm rot="3027872">
-            <a:off x="433201" y="2822043"/>
-            <a:ext cx="632460" cy="251460"/>
+            <a:off x="395101" y="2822043"/>
+            <a:ext cx="708660" cy="251460"/>
           </a:xfrm>
           <a:prstGeom prst="rect">
             <a:avLst/>
@@ -38991,8 +38991,8 @@
         </p:nvSpPr>
         <p:spPr>
           <a:xfrm rot="3467149">
-            <a:off x="505903" y="2922569"/>
-            <a:ext cx="632460" cy="251460"/>
+            <a:off x="467803" y="2922569"/>
+            <a:ext cx="708660" cy="251460"/>
           </a:xfrm>
           <a:prstGeom prst="rect">
             <a:avLst/>
@@ -39032,8 +39032,8 @@
         </p:nvSpPr>
         <p:spPr>
           <a:xfrm rot="3910712">
-            <a:off x="565710" y="3032639"/>
-            <a:ext cx="632460" cy="251460"/>
+            <a:off x="527610" y="3032639"/>
+            <a:ext cx="708660" cy="251460"/>
           </a:xfrm>
           <a:prstGeom prst="rect">
             <a:avLst/>
@@ -39073,8 +39073,8 @@
         </p:nvSpPr>
         <p:spPr>
           <a:xfrm rot="4377592">
-            <a:off x="612810" y="3155784"/>
-            <a:ext cx="632460" cy="251460"/>
+            <a:off x="574710" y="3155784"/>
+            <a:ext cx="708660" cy="251460"/>
           </a:xfrm>
           <a:prstGeom prst="rect">
             <a:avLst/>
@@ -39114,8 +39114,8 @@
         </p:nvSpPr>
         <p:spPr>
           <a:xfrm>
-            <a:off x="68610" y="3231743"/>
-            <a:ext cx="624780" cy="744855"/>
+            <a:off x="30510" y="3231743"/>
+            <a:ext cx="700980" cy="744855"/>
           </a:xfrm>
           <a:prstGeom prst="rect">
             <a:avLst/>
@@ -41684,8 +41684,8 @@
         </p:nvSpPr>
         <p:spPr>
           <a:xfrm>
-            <a:off x="9916864" y="3204561"/>
-            <a:ext cx="864691" cy="411299"/>
+            <a:off x="9878764" y="3204561"/>
+            <a:ext cx="940891" cy="411299"/>
           </a:xfrm>
           <a:prstGeom prst="rect">
             <a:avLst/>
@@ -41725,8 +41725,8 @@
         </p:nvSpPr>
         <p:spPr>
           <a:xfrm>
-            <a:off x="9916641" y="3465857"/>
-            <a:ext cx="865138" cy="411299"/>
+            <a:off x="9878541" y="3465857"/>
+            <a:ext cx="941338" cy="411299"/>
           </a:xfrm>
           <a:prstGeom prst="rect">
             <a:avLst/>
@@ -41766,8 +41766,8 @@
         </p:nvSpPr>
         <p:spPr>
           <a:xfrm>
-            <a:off x="9464771" y="4766223"/>
-            <a:ext cx="1250156" cy="345491"/>
+            <a:off x="9351066" y="4766223"/>
+            <a:ext cx="1477566" cy="345491"/>
           </a:xfrm>
           <a:prstGeom prst="rect">
             <a:avLst/>
@@ -41807,8 +41807,8 @@
         </p:nvSpPr>
         <p:spPr>
           <a:xfrm>
-            <a:off x="9425332" y="5027518"/>
-            <a:ext cx="1329035" cy="345491"/>
+            <a:off x="9284019" y="5027518"/>
+            <a:ext cx="1611660" cy="345491"/>
           </a:xfrm>
           <a:prstGeom prst="rect">
             <a:avLst/>
@@ -41848,8 +41848,8 @@
         </p:nvSpPr>
         <p:spPr>
           <a:xfrm>
-            <a:off x="9695976" y="5288814"/>
-            <a:ext cx="787940" cy="345491"/>
+            <a:off x="9657876" y="5288814"/>
+            <a:ext cx="864140" cy="345491"/>
           </a:xfrm>
           <a:prstGeom prst="rect">
             <a:avLst/>
@@ -41889,8 +41889,8 @@
         </p:nvSpPr>
         <p:spPr>
           <a:xfrm>
-            <a:off x="8116890" y="4892034"/>
-            <a:ext cx="1193602" cy="345491"/>
+            <a:off x="8022979" y="4892034"/>
+            <a:ext cx="1381423" cy="345491"/>
           </a:xfrm>
           <a:prstGeom prst="rect">
             <a:avLst/>
@@ -41930,8 +41930,8 @@
         </p:nvSpPr>
         <p:spPr>
           <a:xfrm>
-            <a:off x="8319817" y="5153329"/>
-            <a:ext cx="787940" cy="345491"/>
+            <a:off x="8281717" y="5153329"/>
+            <a:ext cx="864140" cy="345491"/>
           </a:xfrm>
           <a:prstGeom prst="rect">
             <a:avLst/>
@@ -41971,8 +41971,8 @@
         </p:nvSpPr>
         <p:spPr>
           <a:xfrm>
-            <a:off x="7930828" y="3130704"/>
-            <a:ext cx="1047006" cy="345491"/>
+            <a:off x="7888225" y="3130704"/>
+            <a:ext cx="1132210" cy="345491"/>
           </a:xfrm>
           <a:prstGeom prst="rect">
             <a:avLst/>
@@ -42012,8 +42012,8 @@
         </p:nvSpPr>
         <p:spPr>
           <a:xfrm>
-            <a:off x="7857530" y="3392000"/>
-            <a:ext cx="1193602" cy="345491"/>
+            <a:off x="7763619" y="3392000"/>
+            <a:ext cx="1381423" cy="345491"/>
           </a:xfrm>
           <a:prstGeom prst="rect">
             <a:avLst/>
@@ -42053,8 +42053,8 @@
         </p:nvSpPr>
         <p:spPr>
           <a:xfrm>
-            <a:off x="8060457" y="3653295"/>
-            <a:ext cx="787940" cy="345491"/>
+            <a:off x="8022357" y="3653295"/>
+            <a:ext cx="864140" cy="345491"/>
           </a:xfrm>
           <a:prstGeom prst="rect">
             <a:avLst/>
@@ -42140,8 +42140,8 @@
         </p:nvSpPr>
         <p:spPr>
           <a:xfrm>
-            <a:off x="9608053" y="2100161"/>
-            <a:ext cx="550515" cy="493559"/>
+            <a:off x="9798553" y="2100161"/>
+            <a:ext cx="626715" cy="493559"/>
           </a:xfrm>
           <a:prstGeom prst="rect">
             <a:avLst/>
@@ -42154,7 +42154,7 @@
           </a:bodyPr>
           <a:lstStyle/>
           <a:p>
-            <a:pPr algn="ctr">
+            <a:pPr algn="l">
               <a:lnSpc>
                 <a:spcPts val="2743"/>
               </a:lnSpc>
@@ -42181,8 +42181,8 @@
         </p:nvSpPr>
         <p:spPr>
           <a:xfrm>
-            <a:off x="9917736" y="2243597"/>
-            <a:ext cx="1756916" cy="263231"/>
+            <a:off x="10108236" y="2243597"/>
+            <a:ext cx="2339057" cy="263231"/>
           </a:xfrm>
           <a:prstGeom prst="rect">
             <a:avLst/>
@@ -42195,7 +42195,7 @@
           </a:bodyPr>
           <a:lstStyle/>
           <a:p>
-            <a:pPr algn="ctr">
+            <a:pPr algn="l">
               <a:lnSpc>
                 <a:spcPts val="1463"/>
               </a:lnSpc>
@@ -42222,8 +42222,8 @@
         </p:nvSpPr>
         <p:spPr>
           <a:xfrm>
-            <a:off x="10001783" y="2742046"/>
-            <a:ext cx="638724" cy="619368"/>
+            <a:off x="10040494" y="2683980"/>
+            <a:ext cx="638723" cy="619369"/>
           </a:xfrm>
           <a:custGeom>
             <a:avLst/>
@@ -42232,30 +42232,30 @@
             <a:cxnLst/>
             <a:rect l="l" t="t" r="r" b="b"/>
             <a:pathLst>
-              <a:path w="638724" h="619368">
+              <a:path w="638723" h="619369">
                 <a:moveTo>
-                  <a:pt x="319362" y="0"/>
+                  <a:pt x="319361" y="0"/>
                 </a:moveTo>
                 <a:lnTo>
-                  <a:pt x="406461" y="212908"/>
+                  <a:pt x="406460" y="212908"/>
                 </a:lnTo>
                 <a:lnTo>
-                  <a:pt x="638724" y="232263"/>
+                  <a:pt x="638723" y="232263"/>
                 </a:lnTo>
                 <a:lnTo>
                   <a:pt x="464526" y="387105"/>
                 </a:lnTo>
                 <a:lnTo>
-                  <a:pt x="512915" y="619368"/>
+                  <a:pt x="512914" y="619369"/>
                 </a:lnTo>
                 <a:lnTo>
-                  <a:pt x="319362" y="493559"/>
+                  <a:pt x="319361" y="493559"/>
                 </a:lnTo>
                 <a:lnTo>
-                  <a:pt x="125809" y="619368"/>
+                  <a:pt x="125809" y="619369"/>
                 </a:lnTo>
                 <a:lnTo>
-                  <a:pt x="174198" y="387105"/>
+                  <a:pt x="174197" y="387105"/>
                 </a:lnTo>
                 <a:lnTo>
                   <a:pt x="0" y="232263"/>

--- a/materials/dist/1주차_오리엔테이션.pptx
+++ b/materials/dist/1주차_오리엔테이션.pptx
@@ -5873,7 +5873,7 @@
         <p:spPr>
           <a:xfrm>
             <a:off x="419100" y="104775"/>
-            <a:ext cx="1319957" cy="323850"/>
+            <a:ext cx="1281857" cy="323850"/>
           </a:xfrm>
           <a:prstGeom prst="rect">
             <a:avLst/>
@@ -5881,10 +5881,8 @@
           <a:solidFill>
             <a:srgbClr val="002A55"/>
           </a:solidFill>
-          <a:ln w="19050">
-            <a:solidFill>
-              <a:srgbClr val="FFF100"/>
-            </a:solidFill>
+          <a:ln>
+            <a:noFill/>
           </a:ln>
           <a:effectLst/>
         </p:spPr>
@@ -5918,7 +5916,7 @@
         </p:nvSpPr>
         <p:spPr>
           <a:xfrm>
-            <a:off x="609600" y="103346"/>
+            <a:off x="590550" y="103346"/>
             <a:ext cx="536019" cy="364808"/>
           </a:xfrm>
           <a:prstGeom prst="rect">
@@ -5946,7 +5944,7 @@
             <a:r>
               <a:rPr sz="1425" b="1" spc="-30">
                 <a:solidFill>
-                  <a:srgbClr val="FFF100"/>
+                  <a:srgbClr val="FFFFFF"/>
                 </a:solidFill>
                 <a:latin typeface="Arial"/>
                 <a:ea typeface="맑은 고딕"/>
@@ -5965,7 +5963,7 @@
         </p:nvSpPr>
         <p:spPr>
           <a:xfrm>
-            <a:off x="801737" y="85725"/>
+            <a:off x="782687" y="85725"/>
             <a:ext cx="1575911" cy="381000"/>
           </a:xfrm>
           <a:prstGeom prst="rect">
@@ -5993,7 +5991,7 @@
             <a:r>
               <a:rPr sz="1500" b="1" spc="-30">
                 <a:solidFill>
-                  <a:srgbClr val="FFFFFF"/>
+                  <a:srgbClr val="FFF100"/>
                 </a:solidFill>
                 <a:latin typeface="맑은 고딕"/>
                 <a:ea typeface="맑은 고딕"/>
@@ -8690,7 +8688,7 @@
         <p:spPr>
           <a:xfrm>
             <a:off x="419100" y="104775"/>
-            <a:ext cx="2027337" cy="323850"/>
+            <a:ext cx="1989237" cy="323850"/>
           </a:xfrm>
           <a:prstGeom prst="rect">
             <a:avLst/>
@@ -8698,10 +8696,8 @@
           <a:solidFill>
             <a:srgbClr val="002A55"/>
           </a:solidFill>
-          <a:ln w="19050">
-            <a:solidFill>
-              <a:srgbClr val="FFF100"/>
-            </a:solidFill>
+          <a:ln>
+            <a:noFill/>
           </a:ln>
           <a:effectLst/>
         </p:spPr>
@@ -8735,7 +8731,7 @@
         </p:nvSpPr>
         <p:spPr>
           <a:xfrm>
-            <a:off x="609600" y="103346"/>
+            <a:off x="590550" y="103346"/>
             <a:ext cx="536019" cy="364808"/>
           </a:xfrm>
           <a:prstGeom prst="rect">
@@ -8763,7 +8759,7 @@
             <a:r>
               <a:rPr sz="1425" b="1" spc="-30">
                 <a:solidFill>
-                  <a:srgbClr val="FFF100"/>
+                  <a:srgbClr val="FFFFFF"/>
                 </a:solidFill>
                 <a:latin typeface="Arial"/>
                 <a:ea typeface="맑은 고딕"/>
@@ -8782,7 +8778,7 @@
         </p:nvSpPr>
         <p:spPr>
           <a:xfrm>
-            <a:off x="801737" y="85725"/>
+            <a:off x="782687" y="85725"/>
             <a:ext cx="2707719" cy="381000"/>
           </a:xfrm>
           <a:prstGeom prst="rect">
@@ -8810,7 +8806,7 @@
             <a:r>
               <a:rPr sz="1500" b="1" spc="-30">
                 <a:solidFill>
-                  <a:srgbClr val="FFFFFF"/>
+                  <a:srgbClr val="FFF100"/>
                 </a:solidFill>
                 <a:latin typeface="맑은 고딕"/>
                 <a:ea typeface="맑은 고딕"/>
@@ -10801,7 +10797,7 @@
         <p:spPr>
           <a:xfrm>
             <a:off x="419100" y="104775"/>
-            <a:ext cx="2027337" cy="323850"/>
+            <a:ext cx="1989237" cy="323850"/>
           </a:xfrm>
           <a:prstGeom prst="rect">
             <a:avLst/>
@@ -10809,10 +10805,8 @@
           <a:solidFill>
             <a:srgbClr val="002A55"/>
           </a:solidFill>
-          <a:ln w="19050">
-            <a:solidFill>
-              <a:srgbClr val="FFF100"/>
-            </a:solidFill>
+          <a:ln>
+            <a:noFill/>
           </a:ln>
           <a:effectLst/>
         </p:spPr>
@@ -10846,7 +10840,7 @@
         </p:nvSpPr>
         <p:spPr>
           <a:xfrm>
-            <a:off x="609600" y="103346"/>
+            <a:off x="590550" y="103346"/>
             <a:ext cx="536019" cy="364808"/>
           </a:xfrm>
           <a:prstGeom prst="rect">
@@ -10874,7 +10868,7 @@
             <a:r>
               <a:rPr sz="1425" b="1" spc="-30">
                 <a:solidFill>
-                  <a:srgbClr val="FFF100"/>
+                  <a:srgbClr val="FFFFFF"/>
                 </a:solidFill>
                 <a:latin typeface="Arial"/>
                 <a:ea typeface="맑은 고딕"/>
@@ -10893,7 +10887,7 @@
         </p:nvSpPr>
         <p:spPr>
           <a:xfrm>
-            <a:off x="801737" y="85725"/>
+            <a:off x="782687" y="85725"/>
             <a:ext cx="2707719" cy="381000"/>
           </a:xfrm>
           <a:prstGeom prst="rect">
@@ -10921,7 +10915,7 @@
             <a:r>
               <a:rPr sz="1500" b="1" spc="-30">
                 <a:solidFill>
-                  <a:srgbClr val="FFFFFF"/>
+                  <a:srgbClr val="FFF100"/>
                 </a:solidFill>
                 <a:latin typeface="맑은 고딕"/>
                 <a:ea typeface="맑은 고딕"/>
@@ -11314,7 +11308,7 @@
         <p:spPr>
           <a:xfrm>
             <a:off x="1047750" y="2152055"/>
-            <a:ext cx="10525125" cy="590550"/>
+            <a:ext cx="10467975" cy="590550"/>
           </a:xfrm>
           <a:prstGeom prst="rect">
             <a:avLst/>
@@ -11902,8 +11896,8 @@
         </p:nvSpPr>
         <p:spPr>
           <a:xfrm>
-            <a:off x="4190184" y="5641088"/>
-            <a:ext cx="4237400" cy="810985"/>
+            <a:off x="4190184" y="5600538"/>
+            <a:ext cx="4237400" cy="529286"/>
           </a:xfrm>
           <a:custGeom>
             <a:avLst/>
@@ -11912,17 +11906,37 @@
             <a:cxnLst/>
             <a:rect l="l" t="t" r="r" b="b"/>
             <a:pathLst>
-              <a:path w="4237400" h="810985">
+              <a:path w="4237400" h="529286">
                 <a:moveTo>
                   <a:pt x="4237400" y="0"/>
                 </a:moveTo>
                 <a:lnTo>
-                  <a:pt x="2108562" y="810985"/>
+                  <a:pt x="3792624" y="195787"/>
+                </a:lnTo>
+                <a:lnTo>
+                  <a:pt x="3331055" y="347812"/>
+                </a:lnTo>
+                <a:lnTo>
+                  <a:pt x="2856986" y="454661"/>
+                </a:lnTo>
+                <a:lnTo>
+                  <a:pt x="2374829" y="515341"/>
+                </a:lnTo>
+                <a:lnTo>
+                  <a:pt x="1889068" y="529286"/>
+                </a:lnTo>
+                <a:lnTo>
+                  <a:pt x="1404223" y="496368"/>
+                </a:lnTo>
+                <a:lnTo>
+                  <a:pt x="924806" y="416891"/>
+                </a:lnTo>
+                <a:lnTo>
+                  <a:pt x="455275" y="291596"/>
                 </a:lnTo>
                 <a:lnTo>
                   <a:pt x="0" y="121648"/>
                 </a:lnTo>
-                <a:close/>
               </a:path>
             </a:pathLst>
           </a:custGeom>
@@ -11964,8 +11978,8 @@
         </p:nvSpPr>
         <p:spPr>
           <a:xfrm>
-            <a:off x="4190184" y="5600538"/>
-            <a:ext cx="223021" cy="162198"/>
+            <a:off x="4190184" y="5559989"/>
+            <a:ext cx="223021" cy="162197"/>
           </a:xfrm>
           <a:custGeom>
             <a:avLst/>
@@ -11974,9 +11988,9 @@
             <a:cxnLst/>
             <a:rect l="l" t="t" r="r" b="b"/>
             <a:pathLst>
-              <a:path w="223021" h="162198">
+              <a:path w="223021" h="162197">
                 <a:moveTo>
-                  <a:pt x="0" y="162198"/>
+                  <a:pt x="0" y="162197"/>
                 </a:moveTo>
                 <a:lnTo>
                   <a:pt x="223021" y="141923"/>
@@ -12026,7 +12040,7 @@
         </p:nvSpPr>
         <p:spPr>
           <a:xfrm>
-            <a:off x="4972860" y="5991761"/>
+            <a:off x="4972860" y="6093141"/>
             <a:ext cx="2651774" cy="310202"/>
           </a:xfrm>
           <a:prstGeom prst="rect">
@@ -13063,7 +13077,7 @@
         <p:spPr>
           <a:xfrm>
             <a:off x="419100" y="104775"/>
-            <a:ext cx="1791593" cy="323850"/>
+            <a:ext cx="1753493" cy="323850"/>
           </a:xfrm>
           <a:prstGeom prst="rect">
             <a:avLst/>
@@ -13071,10 +13085,8 @@
           <a:solidFill>
             <a:srgbClr val="002A55"/>
           </a:solidFill>
-          <a:ln w="19050">
-            <a:solidFill>
-              <a:srgbClr val="FFF100"/>
-            </a:solidFill>
+          <a:ln>
+            <a:noFill/>
           </a:ln>
           <a:effectLst/>
         </p:spPr>
@@ -13108,7 +13120,7 @@
         </p:nvSpPr>
         <p:spPr>
           <a:xfrm>
-            <a:off x="609600" y="103346"/>
+            <a:off x="590550" y="103346"/>
             <a:ext cx="536019" cy="364808"/>
           </a:xfrm>
           <a:prstGeom prst="rect">
@@ -13136,7 +13148,7 @@
             <a:r>
               <a:rPr sz="1425" b="1" spc="-30">
                 <a:solidFill>
-                  <a:srgbClr val="FFF100"/>
+                  <a:srgbClr val="FFFFFF"/>
                 </a:solidFill>
                 <a:latin typeface="Arial"/>
                 <a:ea typeface="맑은 고딕"/>
@@ -13155,7 +13167,7 @@
         </p:nvSpPr>
         <p:spPr>
           <a:xfrm>
-            <a:off x="801737" y="85725"/>
+            <a:off x="782687" y="85725"/>
             <a:ext cx="2330529" cy="381000"/>
           </a:xfrm>
           <a:prstGeom prst="rect">
@@ -13183,7 +13195,7 @@
             <a:r>
               <a:rPr sz="1500" b="1" spc="-30">
                 <a:solidFill>
-                  <a:srgbClr val="FFFFFF"/>
+                  <a:srgbClr val="FFF100"/>
                 </a:solidFill>
                 <a:latin typeface="맑은 고딕"/>
                 <a:ea typeface="맑은 고딕"/>
@@ -15404,7 +15416,7 @@
         <p:spPr>
           <a:xfrm>
             <a:off x="419100" y="104775"/>
-            <a:ext cx="1978223" cy="323850"/>
+            <a:ext cx="1940123" cy="323850"/>
           </a:xfrm>
           <a:prstGeom prst="rect">
             <a:avLst/>
@@ -15412,10 +15424,8 @@
           <a:solidFill>
             <a:srgbClr val="002A55"/>
           </a:solidFill>
-          <a:ln w="19050">
-            <a:solidFill>
-              <a:srgbClr val="FFF100"/>
-            </a:solidFill>
+          <a:ln>
+            <a:noFill/>
           </a:ln>
           <a:effectLst/>
         </p:spPr>
@@ -15449,7 +15459,7 @@
         </p:nvSpPr>
         <p:spPr>
           <a:xfrm>
-            <a:off x="609600" y="103346"/>
+            <a:off x="590550" y="103346"/>
             <a:ext cx="536019" cy="364808"/>
           </a:xfrm>
           <a:prstGeom prst="rect">
@@ -15477,7 +15487,7 @@
             <a:r>
               <a:rPr sz="1425" b="1" spc="-30">
                 <a:solidFill>
-                  <a:srgbClr val="FFF100"/>
+                  <a:srgbClr val="FFFFFF"/>
                 </a:solidFill>
                 <a:latin typeface="Arial"/>
                 <a:ea typeface="맑은 고딕"/>
@@ -15496,7 +15506,7 @@
         </p:nvSpPr>
         <p:spPr>
           <a:xfrm>
-            <a:off x="801737" y="85725"/>
+            <a:off x="782687" y="85725"/>
             <a:ext cx="2629138" cy="381000"/>
           </a:xfrm>
           <a:prstGeom prst="rect">
@@ -15524,7 +15534,7 @@
             <a:r>
               <a:rPr sz="1500" b="1" spc="-30">
                 <a:solidFill>
-                  <a:srgbClr val="FFFFFF"/>
+                  <a:srgbClr val="FFF100"/>
                 </a:solidFill>
                 <a:latin typeface="맑은 고딕"/>
                 <a:ea typeface="맑은 고딕"/>
@@ -16926,7 +16936,7 @@
         <p:spPr>
           <a:xfrm>
             <a:off x="419100" y="104775"/>
-            <a:ext cx="1978223" cy="323850"/>
+            <a:ext cx="1940123" cy="323850"/>
           </a:xfrm>
           <a:prstGeom prst="rect">
             <a:avLst/>
@@ -16934,10 +16944,8 @@
           <a:solidFill>
             <a:srgbClr val="002A55"/>
           </a:solidFill>
-          <a:ln w="19050">
-            <a:solidFill>
-              <a:srgbClr val="FFF100"/>
-            </a:solidFill>
+          <a:ln>
+            <a:noFill/>
           </a:ln>
           <a:effectLst/>
         </p:spPr>
@@ -16971,7 +16979,7 @@
         </p:nvSpPr>
         <p:spPr>
           <a:xfrm>
-            <a:off x="609600" y="103346"/>
+            <a:off x="590550" y="103346"/>
             <a:ext cx="536019" cy="364808"/>
           </a:xfrm>
           <a:prstGeom prst="rect">
@@ -16999,7 +17007,7 @@
             <a:r>
               <a:rPr sz="1425" b="1" spc="-30">
                 <a:solidFill>
-                  <a:srgbClr val="FFF100"/>
+                  <a:srgbClr val="FFFFFF"/>
                 </a:solidFill>
                 <a:latin typeface="Arial"/>
                 <a:ea typeface="맑은 고딕"/>
@@ -17018,7 +17026,7 @@
         </p:nvSpPr>
         <p:spPr>
           <a:xfrm>
-            <a:off x="801737" y="85725"/>
+            <a:off x="782687" y="85725"/>
             <a:ext cx="2629138" cy="381000"/>
           </a:xfrm>
           <a:prstGeom prst="rect">
@@ -17046,7 +17054,7 @@
             <a:r>
               <a:rPr sz="1500" b="1" spc="-30">
                 <a:solidFill>
-                  <a:srgbClr val="FFFFFF"/>
+                  <a:srgbClr val="FFF100"/>
                 </a:solidFill>
                 <a:latin typeface="맑은 고딕"/>
                 <a:ea typeface="맑은 고딕"/>
@@ -18660,7 +18668,7 @@
         <p:spPr>
           <a:xfrm>
             <a:off x="419100" y="104775"/>
-            <a:ext cx="2557016" cy="323850"/>
+            <a:ext cx="2518916" cy="323850"/>
           </a:xfrm>
           <a:prstGeom prst="rect">
             <a:avLst/>
@@ -18668,10 +18676,8 @@
           <a:solidFill>
             <a:srgbClr val="002A55"/>
           </a:solidFill>
-          <a:ln w="19050">
-            <a:solidFill>
-              <a:srgbClr val="FFF100"/>
-            </a:solidFill>
+          <a:ln>
+            <a:noFill/>
           </a:ln>
           <a:effectLst/>
         </p:spPr>
@@ -18705,7 +18711,7 @@
         </p:nvSpPr>
         <p:spPr>
           <a:xfrm>
-            <a:off x="609600" y="85725"/>
+            <a:off x="590550" y="85725"/>
             <a:ext cx="3862626" cy="381000"/>
           </a:xfrm>
           <a:prstGeom prst="rect">
@@ -18733,7 +18739,7 @@
             <a:r>
               <a:rPr sz="1500" b="1" spc="-30">
                 <a:solidFill>
-                  <a:srgbClr val="FFFFFF"/>
+                  <a:srgbClr val="FFF100"/>
                 </a:solidFill>
                 <a:latin typeface="맑은 고딕"/>
                 <a:ea typeface="맑은 고딕"/>
@@ -20740,7 +20746,7 @@
         <p:spPr>
           <a:xfrm>
             <a:off x="419100" y="104775"/>
-            <a:ext cx="1929110" cy="323850"/>
+            <a:ext cx="1891010" cy="323850"/>
           </a:xfrm>
           <a:prstGeom prst="rect">
             <a:avLst/>
@@ -20748,10 +20754,8 @@
           <a:solidFill>
             <a:srgbClr val="002A55"/>
           </a:solidFill>
-          <a:ln w="19050">
-            <a:solidFill>
-              <a:srgbClr val="FFF100"/>
-            </a:solidFill>
+          <a:ln>
+            <a:noFill/>
           </a:ln>
           <a:effectLst/>
         </p:spPr>
@@ -20785,7 +20789,7 @@
         </p:nvSpPr>
         <p:spPr>
           <a:xfrm>
-            <a:off x="609600" y="103346"/>
+            <a:off x="590550" y="103346"/>
             <a:ext cx="536019" cy="364808"/>
           </a:xfrm>
           <a:prstGeom prst="rect">
@@ -20813,7 +20817,7 @@
             <a:r>
               <a:rPr sz="1425" b="1" spc="-30">
                 <a:solidFill>
-                  <a:srgbClr val="FFF100"/>
+                  <a:srgbClr val="FFFFFF"/>
                 </a:solidFill>
                 <a:latin typeface="Arial"/>
                 <a:ea typeface="맑은 고딕"/>
@@ -20832,7 +20836,7 @@
         </p:nvSpPr>
         <p:spPr>
           <a:xfrm>
-            <a:off x="801737" y="85725"/>
+            <a:off x="782687" y="85725"/>
             <a:ext cx="2550557" cy="381000"/>
           </a:xfrm>
           <a:prstGeom prst="rect">
@@ -20860,7 +20864,7 @@
             <a:r>
               <a:rPr sz="1500" b="1" spc="-30">
                 <a:solidFill>
-                  <a:srgbClr val="FFFFFF"/>
+                  <a:srgbClr val="FFF100"/>
                 </a:solidFill>
                 <a:latin typeface="맑은 고딕"/>
                 <a:ea typeface="맑은 고딕"/>
@@ -22115,7 +22119,7 @@
         <p:spPr>
           <a:xfrm>
             <a:off x="419100" y="104775"/>
-            <a:ext cx="1929110" cy="323850"/>
+            <a:ext cx="1891010" cy="323850"/>
           </a:xfrm>
           <a:prstGeom prst="rect">
             <a:avLst/>
@@ -22123,10 +22127,8 @@
           <a:solidFill>
             <a:srgbClr val="002A55"/>
           </a:solidFill>
-          <a:ln w="19050">
-            <a:solidFill>
-              <a:srgbClr val="FFF100"/>
-            </a:solidFill>
+          <a:ln>
+            <a:noFill/>
           </a:ln>
           <a:effectLst/>
         </p:spPr>
@@ -22160,7 +22162,7 @@
         </p:nvSpPr>
         <p:spPr>
           <a:xfrm>
-            <a:off x="609600" y="103346"/>
+            <a:off x="590550" y="103346"/>
             <a:ext cx="536019" cy="364808"/>
           </a:xfrm>
           <a:prstGeom prst="rect">
@@ -22188,7 +22190,7 @@
             <a:r>
               <a:rPr sz="1425" b="1" spc="-30">
                 <a:solidFill>
-                  <a:srgbClr val="FFF100"/>
+                  <a:srgbClr val="FFFFFF"/>
                 </a:solidFill>
                 <a:latin typeface="Arial"/>
                 <a:ea typeface="맑은 고딕"/>
@@ -22207,7 +22209,7 @@
         </p:nvSpPr>
         <p:spPr>
           <a:xfrm>
-            <a:off x="801737" y="85725"/>
+            <a:off x="782687" y="85725"/>
             <a:ext cx="2550557" cy="381000"/>
           </a:xfrm>
           <a:prstGeom prst="rect">
@@ -22235,7 +22237,7 @@
             <a:r>
               <a:rPr sz="1500" b="1" spc="-30">
                 <a:solidFill>
-                  <a:srgbClr val="FFFFFF"/>
+                  <a:srgbClr val="FFF100"/>
                 </a:solidFill>
                 <a:latin typeface="맑은 고딕"/>
                 <a:ea typeface="맑은 고딕"/>
@@ -25112,7 +25114,7 @@
         <p:spPr>
           <a:xfrm>
             <a:off x="419100" y="104775"/>
-            <a:ext cx="1929110" cy="323850"/>
+            <a:ext cx="1891010" cy="323850"/>
           </a:xfrm>
           <a:prstGeom prst="rect">
             <a:avLst/>
@@ -25120,10 +25122,8 @@
           <a:solidFill>
             <a:srgbClr val="002A55"/>
           </a:solidFill>
-          <a:ln w="19050">
-            <a:solidFill>
-              <a:srgbClr val="FFF100"/>
-            </a:solidFill>
+          <a:ln>
+            <a:noFill/>
           </a:ln>
           <a:effectLst/>
         </p:spPr>
@@ -25157,7 +25157,7 @@
         </p:nvSpPr>
         <p:spPr>
           <a:xfrm>
-            <a:off x="609600" y="103346"/>
+            <a:off x="590550" y="103346"/>
             <a:ext cx="536019" cy="364808"/>
           </a:xfrm>
           <a:prstGeom prst="rect">
@@ -25185,7 +25185,7 @@
             <a:r>
               <a:rPr sz="1425" b="1" spc="-30">
                 <a:solidFill>
-                  <a:srgbClr val="FFF100"/>
+                  <a:srgbClr val="FFFFFF"/>
                 </a:solidFill>
                 <a:latin typeface="Arial"/>
                 <a:ea typeface="맑은 고딕"/>
@@ -25204,7 +25204,7 @@
         </p:nvSpPr>
         <p:spPr>
           <a:xfrm>
-            <a:off x="801737" y="85725"/>
+            <a:off x="782687" y="85725"/>
             <a:ext cx="2550557" cy="381000"/>
           </a:xfrm>
           <a:prstGeom prst="rect">
@@ -25232,7 +25232,7 @@
             <a:r>
               <a:rPr sz="1500" b="1" spc="-30">
                 <a:solidFill>
-                  <a:srgbClr val="FFFFFF"/>
+                  <a:srgbClr val="FFF100"/>
                 </a:solidFill>
                 <a:latin typeface="맑은 고딕"/>
                 <a:ea typeface="맑은 고딕"/>
@@ -25524,8 +25524,8 @@
         </p:nvSpPr>
         <p:spPr>
           <a:xfrm>
-            <a:off x="613349" y="3172671"/>
-            <a:ext cx="3928958" cy="285194"/>
+            <a:off x="613349" y="3192443"/>
+            <a:ext cx="3514278" cy="255173"/>
           </a:xfrm>
           <a:prstGeom prst="rect">
             <a:avLst/>
@@ -25540,11 +25540,11 @@
           <a:p>
             <a:pPr algn="l">
               <a:lnSpc>
-                <a:spcPts val="1585"/>
+                <a:spcPts val="1418"/>
               </a:lnSpc>
             </a:pPr>
             <a:r>
-              <a:rPr sz="1320" b="1">
+              <a:rPr sz="1181" b="1">
                 <a:solidFill>
                   <a:srgbClr val="17365D"/>
                 </a:solidFill>
@@ -27372,7 +27372,7 @@
         <p:spPr>
           <a:xfrm>
             <a:off x="419100" y="104775"/>
-            <a:ext cx="2018109" cy="323850"/>
+            <a:ext cx="1980009" cy="323850"/>
           </a:xfrm>
           <a:prstGeom prst="rect">
             <a:avLst/>
@@ -27380,10 +27380,8 @@
           <a:solidFill>
             <a:srgbClr val="002A55"/>
           </a:solidFill>
-          <a:ln w="19050">
-            <a:solidFill>
-              <a:srgbClr val="FFF100"/>
-            </a:solidFill>
+          <a:ln>
+            <a:noFill/>
           </a:ln>
           <a:effectLst/>
         </p:spPr>
@@ -27417,7 +27415,7 @@
         </p:nvSpPr>
         <p:spPr>
           <a:xfrm>
-            <a:off x="609600" y="85725"/>
+            <a:off x="590550" y="85725"/>
             <a:ext cx="3000375" cy="381000"/>
           </a:xfrm>
           <a:prstGeom prst="rect">
@@ -27445,7 +27443,7 @@
             <a:r>
               <a:rPr sz="1500" b="1" spc="-30">
                 <a:solidFill>
-                  <a:srgbClr val="FFFFFF"/>
+                  <a:srgbClr val="FFF100"/>
                 </a:solidFill>
                 <a:latin typeface="맑은 고딕"/>
                 <a:ea typeface="맑은 고딕"/>
@@ -27674,7 +27672,7 @@
             <a:r>
               <a:rPr sz="1425" b="1">
                 <a:solidFill>
-                  <a:srgbClr val="005BAC"/>
+                  <a:srgbClr val="FFFFFF"/>
                 </a:solidFill>
                 <a:latin typeface="맑은 고딕"/>
                 <a:ea typeface="맑은 고딕"/>
@@ -30219,7 +30217,6 @@
                 <a:lnTo>
                   <a:pt x="78322" y="0"/>
                 </a:lnTo>
-                <a:close/>
               </a:path>
             </a:pathLst>
           </a:custGeom>
@@ -30550,7 +30547,6 @@
                 <a:lnTo>
                   <a:pt x="78321" y="0"/>
                 </a:lnTo>
-                <a:close/>
               </a:path>
             </a:pathLst>
           </a:custGeom>
@@ -32579,8 +32575,8 @@
         </p:nvSpPr>
         <p:spPr>
           <a:xfrm>
-            <a:off x="1217712" y="969407"/>
-            <a:ext cx="507206" cy="640080"/>
+            <a:off x="419100" y="969407"/>
+            <a:ext cx="1445419" cy="640080"/>
           </a:xfrm>
           <a:prstGeom prst="rect">
             <a:avLst/>
@@ -32605,15 +32601,15 @@
               </a:spcAft>
             </a:pPr>
             <a:r>
-              <a:rPr sz="2700" b="0" spc="-81">
-                <a:solidFill>
-                  <a:srgbClr val="9DC3E6"/>
+              <a:rPr sz="2700" b="1" spc="-81">
+                <a:solidFill>
+                  <a:srgbClr val="63666B"/>
                 </a:solidFill>
                 <a:latin typeface="맑은 고딕"/>
                 <a:ea typeface="맑은 고딕"/>
                 <a:cs typeface="맑은 고딕"/>
               </a:rPr>
-              <a:t>|</a:t>
+              <a:t>목차</a:t>
             </a:r>
           </a:p>
         </p:txBody>
@@ -32626,7 +32622,54 @@
         </p:nvSpPr>
         <p:spPr>
           <a:xfrm>
-            <a:off x="1429941" y="1130379"/>
+            <a:off x="1351062" y="969407"/>
+            <a:ext cx="507206" cy="640080"/>
+          </a:xfrm>
+          <a:prstGeom prst="rect">
+            <a:avLst/>
+          </a:prstGeom>
+          <a:noFill/>
+        </p:spPr>
+        <p:txBody>
+          <a:bodyPr wrap="none" anchor="ctr" lIns="0" rIns="0" tIns="0" bIns="0">
+            <a:noAutofit/>
+          </a:bodyPr>
+          <a:lstStyle/>
+          <a:p>
+            <a:pPr algn="l">
+              <a:lnSpc>
+                <a:spcPts val="4050"/>
+              </a:lnSpc>
+              <a:spcBef>
+                <a:spcPts val="0"/>
+              </a:spcBef>
+              <a:spcAft>
+                <a:spcPts val="0"/>
+              </a:spcAft>
+            </a:pPr>
+            <a:r>
+              <a:rPr sz="2700" b="0" spc="-81">
+                <a:solidFill>
+                  <a:srgbClr val="9DC3E6"/>
+                </a:solidFill>
+                <a:latin typeface="맑은 고딕"/>
+                <a:ea typeface="맑은 고딕"/>
+                <a:cs typeface="맑은 고딕"/>
+              </a:rPr>
+              <a:t>|</a:t>
+            </a:r>
+          </a:p>
+        </p:txBody>
+      </p:sp>
+      <p:sp>
+        <p:nvSpPr>
+          <p:cNvPr id="9" name="TextBox 8"/>
+          <p:cNvSpPr txBox="1"/>
+          <p:nvPr/>
+        </p:nvSpPr>
+        <p:spPr>
+          <a:xfrm>
+            <a:off x="1696641" y="1130379"/>
             <a:ext cx="2493407" cy="413385"/>
           </a:xfrm>
           <a:prstGeom prst="rect">
@@ -32667,7 +32710,7 @@
       </p:sp>
       <p:sp>
         <p:nvSpPr>
-          <p:cNvPr id="9" name="Rectangle 8"/>
+          <p:cNvPr id="10" name="Rectangle 9"/>
           <p:cNvSpPr/>
           <p:nvPr/>
         </p:nvSpPr>
@@ -32709,7 +32752,7 @@
       </p:sp>
       <p:cxnSp>
         <p:nvCxnSpPr>
-          <p:cNvPr id="10" name="Connector 9"/>
+          <p:cNvPr id="11" name="Connector 10"/>
           <p:cNvCxnSpPr/>
           <p:nvPr/>
         </p:nvCxnSpPr>
@@ -32745,7 +32788,7 @@
       </p:cxnSp>
       <p:sp>
         <p:nvSpPr>
-          <p:cNvPr id="11" name="TextBox 10"/>
+          <p:cNvPr id="12" name="TextBox 11"/>
           <p:cNvSpPr txBox="1"/>
           <p:nvPr/>
         </p:nvSpPr>
@@ -32786,7 +32829,7 @@
       </p:sp>
       <p:sp>
         <p:nvSpPr>
-          <p:cNvPr id="12" name="TextBox 11"/>
+          <p:cNvPr id="13" name="TextBox 12"/>
           <p:cNvSpPr txBox="1"/>
           <p:nvPr/>
         </p:nvSpPr>
@@ -32833,7 +32876,7 @@
       </p:sp>
       <p:sp>
         <p:nvSpPr>
-          <p:cNvPr id="13" name="TextBox 12"/>
+          <p:cNvPr id="14" name="TextBox 13"/>
           <p:cNvSpPr txBox="1"/>
           <p:nvPr/>
         </p:nvSpPr>
@@ -32880,7 +32923,7 @@
       </p:sp>
       <p:sp>
         <p:nvSpPr>
-          <p:cNvPr id="14" name="Rectangle 13"/>
+          <p:cNvPr id="15" name="Rectangle 14"/>
           <p:cNvSpPr/>
           <p:nvPr/>
         </p:nvSpPr>
@@ -32922,7 +32965,7 @@
       </p:sp>
       <p:cxnSp>
         <p:nvCxnSpPr>
-          <p:cNvPr id="15" name="Connector 14"/>
+          <p:cNvPr id="16" name="Connector 15"/>
           <p:cNvCxnSpPr/>
           <p:nvPr/>
         </p:nvCxnSpPr>
@@ -32958,7 +33001,7 @@
       </p:cxnSp>
       <p:sp>
         <p:nvSpPr>
-          <p:cNvPr id="16" name="TextBox 15"/>
+          <p:cNvPr id="17" name="TextBox 16"/>
           <p:cNvSpPr txBox="1"/>
           <p:nvPr/>
         </p:nvSpPr>
@@ -32999,7 +33042,7 @@
       </p:sp>
       <p:sp>
         <p:nvSpPr>
-          <p:cNvPr id="17" name="TextBox 16"/>
+          <p:cNvPr id="18" name="TextBox 17"/>
           <p:cNvSpPr txBox="1"/>
           <p:nvPr/>
         </p:nvSpPr>
@@ -33046,7 +33089,7 @@
       </p:sp>
       <p:sp>
         <p:nvSpPr>
-          <p:cNvPr id="18" name="TextBox 17"/>
+          <p:cNvPr id="19" name="TextBox 18"/>
           <p:cNvSpPr txBox="1"/>
           <p:nvPr/>
         </p:nvSpPr>
@@ -33093,7 +33136,7 @@
       </p:sp>
       <p:sp>
         <p:nvSpPr>
-          <p:cNvPr id="19" name="Rectangle 18"/>
+          <p:cNvPr id="20" name="Rectangle 19"/>
           <p:cNvSpPr/>
           <p:nvPr/>
         </p:nvSpPr>
@@ -33135,7 +33178,7 @@
       </p:sp>
       <p:cxnSp>
         <p:nvCxnSpPr>
-          <p:cNvPr id="20" name="Connector 19"/>
+          <p:cNvPr id="21" name="Connector 20"/>
           <p:cNvCxnSpPr/>
           <p:nvPr/>
         </p:nvCxnSpPr>
@@ -33171,7 +33214,7 @@
       </p:cxnSp>
       <p:sp>
         <p:nvSpPr>
-          <p:cNvPr id="21" name="TextBox 20"/>
+          <p:cNvPr id="22" name="TextBox 21"/>
           <p:cNvSpPr txBox="1"/>
           <p:nvPr/>
         </p:nvSpPr>
@@ -33212,7 +33255,7 @@
       </p:sp>
       <p:sp>
         <p:nvSpPr>
-          <p:cNvPr id="22" name="TextBox 21"/>
+          <p:cNvPr id="23" name="TextBox 22"/>
           <p:cNvSpPr txBox="1"/>
           <p:nvPr/>
         </p:nvSpPr>
@@ -33259,7 +33302,7 @@
       </p:sp>
       <p:sp>
         <p:nvSpPr>
-          <p:cNvPr id="23" name="TextBox 22"/>
+          <p:cNvPr id="24" name="TextBox 23"/>
           <p:cNvSpPr txBox="1"/>
           <p:nvPr/>
         </p:nvSpPr>
@@ -33306,7 +33349,7 @@
       </p:sp>
       <p:sp>
         <p:nvSpPr>
-          <p:cNvPr id="24" name="Rectangle 23"/>
+          <p:cNvPr id="25" name="Rectangle 24"/>
           <p:cNvSpPr/>
           <p:nvPr/>
         </p:nvSpPr>
@@ -33348,7 +33391,7 @@
       </p:sp>
       <p:cxnSp>
         <p:nvCxnSpPr>
-          <p:cNvPr id="25" name="Connector 24"/>
+          <p:cNvPr id="26" name="Connector 25"/>
           <p:cNvCxnSpPr/>
           <p:nvPr/>
         </p:nvCxnSpPr>
@@ -33384,7 +33427,7 @@
       </p:cxnSp>
       <p:sp>
         <p:nvSpPr>
-          <p:cNvPr id="26" name="TextBox 25"/>
+          <p:cNvPr id="27" name="TextBox 26"/>
           <p:cNvSpPr txBox="1"/>
           <p:nvPr/>
         </p:nvSpPr>
@@ -33425,7 +33468,7 @@
       </p:sp>
       <p:sp>
         <p:nvSpPr>
-          <p:cNvPr id="27" name="TextBox 26"/>
+          <p:cNvPr id="28" name="TextBox 27"/>
           <p:cNvSpPr txBox="1"/>
           <p:nvPr/>
         </p:nvSpPr>
@@ -33472,7 +33515,7 @@
       </p:sp>
       <p:sp>
         <p:nvSpPr>
-          <p:cNvPr id="28" name="TextBox 27"/>
+          <p:cNvPr id="29" name="TextBox 28"/>
           <p:cNvSpPr txBox="1"/>
           <p:nvPr/>
         </p:nvSpPr>
@@ -33519,7 +33562,7 @@
       </p:sp>
       <p:sp>
         <p:nvSpPr>
-          <p:cNvPr id="29" name="Rectangle 28"/>
+          <p:cNvPr id="30" name="Rectangle 29"/>
           <p:cNvSpPr/>
           <p:nvPr/>
         </p:nvSpPr>
@@ -33561,7 +33604,7 @@
       </p:sp>
       <p:cxnSp>
         <p:nvCxnSpPr>
-          <p:cNvPr id="30" name="Connector 29"/>
+          <p:cNvPr id="31" name="Connector 30"/>
           <p:cNvCxnSpPr/>
           <p:nvPr/>
         </p:nvCxnSpPr>
@@ -33597,7 +33640,7 @@
       </p:cxnSp>
       <p:sp>
         <p:nvSpPr>
-          <p:cNvPr id="31" name="TextBox 30"/>
+          <p:cNvPr id="32" name="TextBox 31"/>
           <p:cNvSpPr txBox="1"/>
           <p:nvPr/>
         </p:nvSpPr>
@@ -33638,7 +33681,7 @@
       </p:sp>
       <p:sp>
         <p:nvSpPr>
-          <p:cNvPr id="32" name="TextBox 31"/>
+          <p:cNvPr id="33" name="TextBox 32"/>
           <p:cNvSpPr txBox="1"/>
           <p:nvPr/>
         </p:nvSpPr>
@@ -33685,7 +33728,7 @@
       </p:sp>
       <p:sp>
         <p:nvSpPr>
-          <p:cNvPr id="33" name="TextBox 32"/>
+          <p:cNvPr id="34" name="TextBox 33"/>
           <p:cNvSpPr txBox="1"/>
           <p:nvPr/>
         </p:nvSpPr>
@@ -33732,7 +33775,7 @@
       </p:sp>
       <p:sp>
         <p:nvSpPr>
-          <p:cNvPr id="34" name="TextBox 33"/>
+          <p:cNvPr id="35" name="TextBox 34"/>
           <p:cNvSpPr txBox="1"/>
           <p:nvPr/>
         </p:nvSpPr>
@@ -34734,7 +34777,7 @@
         <p:spPr>
           <a:xfrm>
             <a:off x="419100" y="104775"/>
-            <a:ext cx="1369070" cy="323850"/>
+            <a:ext cx="1330970" cy="323850"/>
           </a:xfrm>
           <a:prstGeom prst="rect">
             <a:avLst/>
@@ -34742,10 +34785,8 @@
           <a:solidFill>
             <a:srgbClr val="002A55"/>
           </a:solidFill>
-          <a:ln w="19050">
-            <a:solidFill>
-              <a:srgbClr val="FFF100"/>
-            </a:solidFill>
+          <a:ln>
+            <a:noFill/>
           </a:ln>
           <a:effectLst/>
         </p:spPr>
@@ -34779,7 +34820,7 @@
         </p:nvSpPr>
         <p:spPr>
           <a:xfrm>
-            <a:off x="609600" y="103346"/>
+            <a:off x="590550" y="103346"/>
             <a:ext cx="536019" cy="364808"/>
           </a:xfrm>
           <a:prstGeom prst="rect">
@@ -34807,7 +34848,7 @@
             <a:r>
               <a:rPr sz="1425" b="1" spc="-30">
                 <a:solidFill>
-                  <a:srgbClr val="FFF100"/>
+                  <a:srgbClr val="FFFFFF"/>
                 </a:solidFill>
                 <a:latin typeface="Arial"/>
                 <a:ea typeface="맑은 고딕"/>
@@ -34826,7 +34867,7 @@
         </p:nvSpPr>
         <p:spPr>
           <a:xfrm>
-            <a:off x="801737" y="85725"/>
+            <a:off x="782687" y="85725"/>
             <a:ext cx="1654493" cy="381000"/>
           </a:xfrm>
           <a:prstGeom prst="rect">
@@ -34854,7 +34895,7 @@
             <a:r>
               <a:rPr sz="1500" b="1" spc="-30">
                 <a:solidFill>
-                  <a:srgbClr val="FFFFFF"/>
+                  <a:srgbClr val="FFF100"/>
                 </a:solidFill>
                 <a:latin typeface="맑은 고딕"/>
                 <a:ea typeface="맑은 고딕"/>
@@ -35659,7 +35700,6 @@
                 <a:lnTo>
                   <a:pt x="0" y="262238"/>
                 </a:lnTo>
-                <a:close/>
               </a:path>
             </a:pathLst>
           </a:custGeom>
@@ -35851,7 +35891,7 @@
         <p:spPr>
           <a:xfrm>
             <a:off x="9325347" y="4894042"/>
-            <a:ext cx="0" cy="209790"/>
+            <a:ext cx="0" cy="87413"/>
           </a:xfrm>
           <a:custGeom>
             <a:avLst/>
@@ -35860,14 +35900,13 @@
             <a:cxnLst/>
             <a:rect l="l" t="t" r="r" b="b"/>
             <a:pathLst>
-              <a:path w="0" h="209790">
+              <a:path w="0" h="87413">
                 <a:moveTo>
                   <a:pt x="0" y="0"/>
                 </a:moveTo>
                 <a:lnTo>
-                  <a:pt x="0" y="209790"/>
+                  <a:pt x="0" y="87413"/>
                 </a:lnTo>
-                <a:close/>
               </a:path>
             </a:pathLst>
           </a:custGeom>
@@ -35903,7 +35942,239 @@
       </p:sp>
       <p:sp>
         <p:nvSpPr>
-          <p:cNvPr id="30" name="Rectangle 29"/>
+          <p:cNvPr id="30" name="Freeform 29"/>
+          <p:cNvSpPr/>
+          <p:nvPr/>
+        </p:nvSpPr>
+        <p:spPr>
+          <a:xfrm>
+            <a:off x="7716955" y="4981455"/>
+            <a:ext cx="3216784" cy="0"/>
+          </a:xfrm>
+          <a:custGeom>
+            <a:avLst/>
+            <a:gdLst/>
+            <a:ahLst/>
+            <a:cxnLst/>
+            <a:rect l="l" t="t" r="r" b="b"/>
+            <a:pathLst>
+              <a:path w="3216784" h="0">
+                <a:moveTo>
+                  <a:pt x="0" y="0"/>
+                </a:moveTo>
+                <a:lnTo>
+                  <a:pt x="3216784" y="0"/>
+                </a:lnTo>
+              </a:path>
+            </a:pathLst>
+          </a:custGeom>
+          <a:noFill/>
+          <a:ln w="26224">
+            <a:solidFill>
+              <a:srgbClr val="9DC3E6"/>
+            </a:solidFill>
+          </a:ln>
+          <a:effectLst/>
+        </p:spPr>
+        <p:style>
+          <a:lnRef idx="1">
+            <a:schemeClr val="accent1"/>
+          </a:lnRef>
+          <a:fillRef idx="3">
+            <a:schemeClr val="accent1"/>
+          </a:fillRef>
+          <a:effectRef idx="2">
+            <a:schemeClr val="accent1"/>
+          </a:effectRef>
+          <a:fontRef idx="minor">
+            <a:schemeClr val="lt1"/>
+          </a:fontRef>
+        </p:style>
+        <p:txBody>
+          <a:bodyPr rtlCol="0" anchor="ctr"/>
+          <a:lstStyle/>
+          <a:p>
+            <a:pPr algn="ctr"/>
+          </a:p>
+        </p:txBody>
+      </p:sp>
+      <p:sp>
+        <p:nvSpPr>
+          <p:cNvPr id="31" name="Freeform 30"/>
+          <p:cNvSpPr/>
+          <p:nvPr/>
+        </p:nvSpPr>
+        <p:spPr>
+          <a:xfrm>
+            <a:off x="7716955" y="4981455"/>
+            <a:ext cx="0" cy="104895"/>
+          </a:xfrm>
+          <a:custGeom>
+            <a:avLst/>
+            <a:gdLst/>
+            <a:ahLst/>
+            <a:cxnLst/>
+            <a:rect l="l" t="t" r="r" b="b"/>
+            <a:pathLst>
+              <a:path w="0" h="104895">
+                <a:moveTo>
+                  <a:pt x="0" y="0"/>
+                </a:moveTo>
+                <a:lnTo>
+                  <a:pt x="0" y="104895"/>
+                </a:lnTo>
+              </a:path>
+            </a:pathLst>
+          </a:custGeom>
+          <a:noFill/>
+          <a:ln w="26224">
+            <a:solidFill>
+              <a:srgbClr val="9DC3E6"/>
+            </a:solidFill>
+          </a:ln>
+          <a:effectLst/>
+        </p:spPr>
+        <p:style>
+          <a:lnRef idx="1">
+            <a:schemeClr val="accent1"/>
+          </a:lnRef>
+          <a:fillRef idx="3">
+            <a:schemeClr val="accent1"/>
+          </a:fillRef>
+          <a:effectRef idx="2">
+            <a:schemeClr val="accent1"/>
+          </a:effectRef>
+          <a:fontRef idx="minor">
+            <a:schemeClr val="lt1"/>
+          </a:fontRef>
+        </p:style>
+        <p:txBody>
+          <a:bodyPr rtlCol="0" anchor="ctr"/>
+          <a:lstStyle/>
+          <a:p>
+            <a:pPr algn="ctr"/>
+          </a:p>
+        </p:txBody>
+      </p:sp>
+      <p:sp>
+        <p:nvSpPr>
+          <p:cNvPr id="32" name="Freeform 31"/>
+          <p:cNvSpPr/>
+          <p:nvPr/>
+        </p:nvSpPr>
+        <p:spPr>
+          <a:xfrm>
+            <a:off x="9325347" y="4981455"/>
+            <a:ext cx="0" cy="104895"/>
+          </a:xfrm>
+          <a:custGeom>
+            <a:avLst/>
+            <a:gdLst/>
+            <a:ahLst/>
+            <a:cxnLst/>
+            <a:rect l="l" t="t" r="r" b="b"/>
+            <a:pathLst>
+              <a:path w="0" h="104895">
+                <a:moveTo>
+                  <a:pt x="0" y="0"/>
+                </a:moveTo>
+                <a:lnTo>
+                  <a:pt x="0" y="104895"/>
+                </a:lnTo>
+              </a:path>
+            </a:pathLst>
+          </a:custGeom>
+          <a:noFill/>
+          <a:ln w="26224">
+            <a:solidFill>
+              <a:srgbClr val="9DC3E6"/>
+            </a:solidFill>
+          </a:ln>
+          <a:effectLst/>
+        </p:spPr>
+        <p:style>
+          <a:lnRef idx="1">
+            <a:schemeClr val="accent1"/>
+          </a:lnRef>
+          <a:fillRef idx="3">
+            <a:schemeClr val="accent1"/>
+          </a:fillRef>
+          <a:effectRef idx="2">
+            <a:schemeClr val="accent1"/>
+          </a:effectRef>
+          <a:fontRef idx="minor">
+            <a:schemeClr val="lt1"/>
+          </a:fontRef>
+        </p:style>
+        <p:txBody>
+          <a:bodyPr rtlCol="0" anchor="ctr"/>
+          <a:lstStyle/>
+          <a:p>
+            <a:pPr algn="ctr"/>
+          </a:p>
+        </p:txBody>
+      </p:sp>
+      <p:sp>
+        <p:nvSpPr>
+          <p:cNvPr id="33" name="Freeform 32"/>
+          <p:cNvSpPr/>
+          <p:nvPr/>
+        </p:nvSpPr>
+        <p:spPr>
+          <a:xfrm>
+            <a:off x="10933739" y="4981455"/>
+            <a:ext cx="0" cy="104895"/>
+          </a:xfrm>
+          <a:custGeom>
+            <a:avLst/>
+            <a:gdLst/>
+            <a:ahLst/>
+            <a:cxnLst/>
+            <a:rect l="l" t="t" r="r" b="b"/>
+            <a:pathLst>
+              <a:path w="0" h="104895">
+                <a:moveTo>
+                  <a:pt x="0" y="0"/>
+                </a:moveTo>
+                <a:lnTo>
+                  <a:pt x="0" y="104895"/>
+                </a:lnTo>
+              </a:path>
+            </a:pathLst>
+          </a:custGeom>
+          <a:noFill/>
+          <a:ln w="26224">
+            <a:solidFill>
+              <a:srgbClr val="9DC3E6"/>
+            </a:solidFill>
+          </a:ln>
+          <a:effectLst/>
+        </p:spPr>
+        <p:style>
+          <a:lnRef idx="1">
+            <a:schemeClr val="accent1"/>
+          </a:lnRef>
+          <a:fillRef idx="3">
+            <a:schemeClr val="accent1"/>
+          </a:fillRef>
+          <a:effectRef idx="2">
+            <a:schemeClr val="accent1"/>
+          </a:effectRef>
+          <a:fontRef idx="minor">
+            <a:schemeClr val="lt1"/>
+          </a:fontRef>
+        </p:style>
+        <p:txBody>
+          <a:bodyPr rtlCol="0" anchor="ctr"/>
+          <a:lstStyle/>
+          <a:p>
+            <a:pPr algn="ctr"/>
+          </a:p>
+        </p:txBody>
+      </p:sp>
+      <p:sp>
+        <p:nvSpPr>
+          <p:cNvPr id="34" name="Rectangle 33"/>
           <p:cNvSpPr/>
           <p:nvPr/>
         </p:nvSpPr>
@@ -35949,7 +36220,7 @@
       </p:sp>
       <p:sp>
         <p:nvSpPr>
-          <p:cNvPr id="31" name="TextBox 30"/>
+          <p:cNvPr id="35" name="TextBox 34"/>
           <p:cNvSpPr txBox="1"/>
           <p:nvPr/>
         </p:nvSpPr>
@@ -35990,7 +36261,7 @@
       </p:sp>
       <p:sp>
         <p:nvSpPr>
-          <p:cNvPr id="32" name="Rectangle 31"/>
+          <p:cNvPr id="36" name="Rectangle 35"/>
           <p:cNvSpPr/>
           <p:nvPr/>
         </p:nvSpPr>
@@ -36036,7 +36307,7 @@
       </p:sp>
       <p:sp>
         <p:nvSpPr>
-          <p:cNvPr id="33" name="TextBox 32"/>
+          <p:cNvPr id="37" name="TextBox 36"/>
           <p:cNvSpPr txBox="1"/>
           <p:nvPr/>
         </p:nvSpPr>
@@ -36077,7 +36348,7 @@
       </p:sp>
       <p:sp>
         <p:nvSpPr>
-          <p:cNvPr id="34" name="Rectangle 33"/>
+          <p:cNvPr id="38" name="Rectangle 37"/>
           <p:cNvSpPr/>
           <p:nvPr/>
         </p:nvSpPr>
@@ -36123,7 +36394,7 @@
       </p:sp>
       <p:sp>
         <p:nvSpPr>
-          <p:cNvPr id="35" name="TextBox 34"/>
+          <p:cNvPr id="39" name="TextBox 38"/>
           <p:cNvSpPr txBox="1"/>
           <p:nvPr/>
         </p:nvSpPr>
@@ -36164,7 +36435,7 @@
       </p:sp>
       <p:sp>
         <p:nvSpPr>
-          <p:cNvPr id="36" name="TextBox 35"/>
+          <p:cNvPr id="40" name="TextBox 39"/>
           <p:cNvSpPr txBox="1"/>
           <p:nvPr/>
         </p:nvSpPr>
@@ -36361,7 +36632,7 @@
         <p:spPr>
           <a:xfrm>
             <a:off x="419100" y="104775"/>
-            <a:ext cx="1369070" cy="323850"/>
+            <a:ext cx="1330970" cy="323850"/>
           </a:xfrm>
           <a:prstGeom prst="rect">
             <a:avLst/>
@@ -36369,10 +36640,8 @@
           <a:solidFill>
             <a:srgbClr val="002A55"/>
           </a:solidFill>
-          <a:ln w="19050">
-            <a:solidFill>
-              <a:srgbClr val="FFF100"/>
-            </a:solidFill>
+          <a:ln>
+            <a:noFill/>
           </a:ln>
           <a:effectLst/>
         </p:spPr>
@@ -36406,7 +36675,7 @@
         </p:nvSpPr>
         <p:spPr>
           <a:xfrm>
-            <a:off x="609600" y="103346"/>
+            <a:off x="590550" y="103346"/>
             <a:ext cx="536019" cy="364808"/>
           </a:xfrm>
           <a:prstGeom prst="rect">
@@ -36434,7 +36703,7 @@
             <a:r>
               <a:rPr sz="1425" b="1" spc="-30">
                 <a:solidFill>
-                  <a:srgbClr val="FFF100"/>
+                  <a:srgbClr val="FFFFFF"/>
                 </a:solidFill>
                 <a:latin typeface="Arial"/>
                 <a:ea typeface="맑은 고딕"/>
@@ -36453,7 +36722,7 @@
         </p:nvSpPr>
         <p:spPr>
           <a:xfrm>
-            <a:off x="801737" y="85725"/>
+            <a:off x="782687" y="85725"/>
             <a:ext cx="1654493" cy="381000"/>
           </a:xfrm>
           <a:prstGeom prst="rect">
@@ -36481,7 +36750,7 @@
             <a:r>
               <a:rPr sz="1500" b="1" spc="-30">
                 <a:solidFill>
-                  <a:srgbClr val="FFFFFF"/>
+                  <a:srgbClr val="FFF100"/>
                 </a:solidFill>
                 <a:latin typeface="맑은 고딕"/>
                 <a:ea typeface="맑은 고딕"/>
@@ -37883,7 +38152,7 @@
         <p:spPr>
           <a:xfrm>
             <a:off x="419100" y="104775"/>
-            <a:ext cx="1369070" cy="323850"/>
+            <a:ext cx="1330970" cy="323850"/>
           </a:xfrm>
           <a:prstGeom prst="rect">
             <a:avLst/>
@@ -37891,10 +38160,8 @@
           <a:solidFill>
             <a:srgbClr val="002A55"/>
           </a:solidFill>
-          <a:ln w="19050">
-            <a:solidFill>
-              <a:srgbClr val="FFF100"/>
-            </a:solidFill>
+          <a:ln>
+            <a:noFill/>
           </a:ln>
           <a:effectLst/>
         </p:spPr>
@@ -37928,7 +38195,7 @@
         </p:nvSpPr>
         <p:spPr>
           <a:xfrm>
-            <a:off x="609600" y="103346"/>
+            <a:off x="590550" y="103346"/>
             <a:ext cx="536019" cy="364808"/>
           </a:xfrm>
           <a:prstGeom prst="rect">
@@ -37956,7 +38223,7 @@
             <a:r>
               <a:rPr sz="1425" b="1" spc="-30">
                 <a:solidFill>
-                  <a:srgbClr val="FFF100"/>
+                  <a:srgbClr val="FFFFFF"/>
                 </a:solidFill>
                 <a:latin typeface="Arial"/>
                 <a:ea typeface="맑은 고딕"/>
@@ -37975,7 +38242,7 @@
         </p:nvSpPr>
         <p:spPr>
           <a:xfrm>
-            <a:off x="801737" y="85725"/>
+            <a:off x="782687" y="85725"/>
             <a:ext cx="1654493" cy="381000"/>
           </a:xfrm>
           <a:prstGeom prst="rect">
@@ -38003,7 +38270,7 @@
             <a:r>
               <a:rPr sz="1500" b="1" spc="-30">
                 <a:solidFill>
-                  <a:srgbClr val="FFFFFF"/>
+                  <a:srgbClr val="FFF100"/>
                 </a:solidFill>
                 <a:latin typeface="맑은 고딕"/>
                 <a:ea typeface="맑은 고딕"/>
@@ -40210,7 +40477,7 @@
         <p:spPr>
           <a:xfrm>
             <a:off x="419100" y="104775"/>
-            <a:ext cx="1319957" cy="323850"/>
+            <a:ext cx="1281857" cy="323850"/>
           </a:xfrm>
           <a:prstGeom prst="rect">
             <a:avLst/>
@@ -40218,10 +40485,8 @@
           <a:solidFill>
             <a:srgbClr val="002A55"/>
           </a:solidFill>
-          <a:ln w="19050">
-            <a:solidFill>
-              <a:srgbClr val="FFF100"/>
-            </a:solidFill>
+          <a:ln>
+            <a:noFill/>
           </a:ln>
           <a:effectLst/>
         </p:spPr>
@@ -40255,7 +40520,7 @@
         </p:nvSpPr>
         <p:spPr>
           <a:xfrm>
-            <a:off x="609600" y="103346"/>
+            <a:off x="590550" y="103346"/>
             <a:ext cx="536019" cy="364808"/>
           </a:xfrm>
           <a:prstGeom prst="rect">
@@ -40283,7 +40548,7 @@
             <a:r>
               <a:rPr sz="1425" b="1" spc="-30">
                 <a:solidFill>
-                  <a:srgbClr val="FFF100"/>
+                  <a:srgbClr val="FFFFFF"/>
                 </a:solidFill>
                 <a:latin typeface="Arial"/>
                 <a:ea typeface="맑은 고딕"/>
@@ -40302,7 +40567,7 @@
         </p:nvSpPr>
         <p:spPr>
           <a:xfrm>
-            <a:off x="801737" y="85725"/>
+            <a:off x="782687" y="85725"/>
             <a:ext cx="1575911" cy="381000"/>
           </a:xfrm>
           <a:prstGeom prst="rect">
@@ -40330,7 +40595,7 @@
             <a:r>
               <a:rPr sz="1500" b="1" spc="-30">
                 <a:solidFill>
-                  <a:srgbClr val="FFFFFF"/>
+                  <a:srgbClr val="FFF100"/>
                 </a:solidFill>
                 <a:latin typeface="맑은 고딕"/>
                 <a:ea typeface="맑은 고딕"/>
@@ -41340,8 +41605,8 @@
         </p:nvSpPr>
         <p:spPr>
           <a:xfrm>
-            <a:off x="9346621" y="2157109"/>
-            <a:ext cx="1288825" cy="1134613"/>
+            <a:off x="9344011" y="2567288"/>
+            <a:ext cx="1130716" cy="995423"/>
           </a:xfrm>
           <a:custGeom>
             <a:avLst/>
@@ -41350,90 +41615,90 @@
             <a:cxnLst/>
             <a:rect l="l" t="t" r="r" b="b"/>
             <a:pathLst>
-              <a:path w="1288825" h="1134613">
+              <a:path w="1130716" h="995423">
                 <a:moveTo>
-                  <a:pt x="17548" y="0"/>
+                  <a:pt x="15396" y="0"/>
                 </a:moveTo>
                 <a:lnTo>
-                  <a:pt x="145601" y="9501"/>
+                  <a:pt x="127739" y="8335"/>
                 </a:lnTo>
                 <a:lnTo>
-                  <a:pt x="272231" y="30772"/>
+                  <a:pt x="238835" y="26997"/>
                 </a:lnTo>
                 <a:lnTo>
-                  <a:pt x="396360" y="63633"/>
+                  <a:pt x="347736" y="55827"/>
                 </a:lnTo>
                 <a:lnTo>
-                  <a:pt x="516928" y="107803"/>
+                  <a:pt x="453513" y="94578"/>
                 </a:lnTo>
                 <a:lnTo>
-                  <a:pt x="632909" y="162905"/>
+                  <a:pt x="555266" y="142920"/>
                 </a:lnTo>
                 <a:lnTo>
-                  <a:pt x="743312" y="228470"/>
+                  <a:pt x="652125" y="200442"/>
                 </a:lnTo>
                 <a:lnTo>
-                  <a:pt x="847198" y="303939"/>
+                  <a:pt x="743266" y="266653"/>
                 </a:lnTo>
                 <a:lnTo>
-                  <a:pt x="943679" y="388668"/>
+                  <a:pt x="827912" y="340988"/>
                 </a:lnTo>
                 <a:lnTo>
-                  <a:pt x="1031934" y="481935"/>
+                  <a:pt x="905340" y="422813"/>
                 </a:lnTo>
                 <a:lnTo>
-                  <a:pt x="1111211" y="582945"/>
+                  <a:pt x="974891" y="511431"/>
                 </a:lnTo>
                 <a:lnTo>
-                  <a:pt x="1180833" y="690837"/>
+                  <a:pt x="1035972" y="606087"/>
                 </a:lnTo>
                 <a:lnTo>
-                  <a:pt x="1240206" y="804690"/>
+                  <a:pt x="1088062" y="705973"/>
                 </a:lnTo>
                 <a:lnTo>
-                  <a:pt x="1288825" y="923534"/>
+                  <a:pt x="1130716" y="810238"/>
                 </a:lnTo>
                 <a:lnTo>
-                  <a:pt x="696147" y="1134613"/>
+                  <a:pt x="610746" y="995423"/>
                 </a:lnTo>
                 <a:lnTo>
-                  <a:pt x="669525" y="1069532"/>
+                  <a:pt x="587390" y="938325"/>
                 </a:lnTo>
                 <a:lnTo>
-                  <a:pt x="637013" y="1007184"/>
+                  <a:pt x="558867" y="883626"/>
                 </a:lnTo>
                 <a:lnTo>
-                  <a:pt x="598889" y="948101"/>
+                  <a:pt x="525420" y="831791"/>
                 </a:lnTo>
                 <a:lnTo>
-                  <a:pt x="555478" y="892785"/>
+                  <a:pt x="487334" y="783261"/>
                 </a:lnTo>
                 <a:lnTo>
-                  <a:pt x="507151" y="841710"/>
+                  <a:pt x="444935" y="738451"/>
                 </a:lnTo>
                 <a:lnTo>
-                  <a:pt x="454318" y="795309"/>
+                  <a:pt x="398584" y="697743"/>
                 </a:lnTo>
                 <a:lnTo>
-                  <a:pt x="397431" y="753980"/>
+                  <a:pt x="348675" y="661484"/>
                 </a:lnTo>
                 <a:lnTo>
-                  <a:pt x="336974" y="718073"/>
+                  <a:pt x="295635" y="629982"/>
                 </a:lnTo>
                 <a:lnTo>
-                  <a:pt x="273463" y="687896"/>
+                  <a:pt x="239916" y="603507"/>
                 </a:lnTo>
                 <a:lnTo>
-                  <a:pt x="207439" y="663706"/>
+                  <a:pt x="181991" y="582284"/>
                 </a:lnTo>
                 <a:lnTo>
-                  <a:pt x="139466" y="645708"/>
+                  <a:pt x="122357" y="566495"/>
                 </a:lnTo>
                 <a:lnTo>
-                  <a:pt x="70122" y="634057"/>
+                  <a:pt x="61520" y="556272"/>
                 </a:lnTo>
                 <a:lnTo>
-                  <a:pt x="0" y="628851"/>
+                  <a:pt x="0" y="551705"/>
                 </a:lnTo>
                 <a:close/>
               </a:path>
@@ -41477,8 +41742,8 @@
         </p:nvSpPr>
         <p:spPr>
           <a:xfrm>
-            <a:off x="9346621" y="3154562"/>
-            <a:ext cx="1369211" cy="1782668"/>
+            <a:off x="9344011" y="3442377"/>
+            <a:ext cx="1201241" cy="1563976"/>
           </a:xfrm>
           <a:custGeom>
             <a:avLst/>
@@ -41487,132 +41752,132 @@
             <a:cxnLst/>
             <a:rect l="l" t="t" r="r" b="b"/>
             <a:pathLst>
-              <a:path w="1369211" h="1782668">
+              <a:path w="1201241" h="1563976">
                 <a:moveTo>
-                  <a:pt x="1312747" y="0"/>
+                  <a:pt x="1151704" y="0"/>
                 </a:moveTo>
                 <a:lnTo>
-                  <a:pt x="1343023" y="123473"/>
+                  <a:pt x="1178266" y="108326"/>
                 </a:lnTo>
                 <a:lnTo>
-                  <a:pt x="1361897" y="249196"/>
+                  <a:pt x="1194824" y="218625"/>
                 </a:lnTo>
                 <a:lnTo>
-                  <a:pt x="1369211" y="376116"/>
+                  <a:pt x="1201241" y="329975"/>
                 </a:lnTo>
                 <a:lnTo>
-                  <a:pt x="1364903" y="503175"/>
+                  <a:pt x="1197461" y="441446"/>
                 </a:lnTo>
                 <a:lnTo>
-                  <a:pt x="1349009" y="629308"/>
+                  <a:pt x="1183518" y="552107"/>
                 </a:lnTo>
                 <a:lnTo>
-                  <a:pt x="1321663" y="753464"/>
+                  <a:pt x="1159526" y="661031"/>
                 </a:lnTo>
                 <a:lnTo>
-                  <a:pt x="1283093" y="874603"/>
+                  <a:pt x="1125688" y="767309"/>
                 </a:lnTo>
                 <a:lnTo>
-                  <a:pt x="1233622" y="991713"/>
+                  <a:pt x="1082285" y="870053"/>
                 </a:lnTo>
                 <a:lnTo>
-                  <a:pt x="1173662" y="1103816"/>
+                  <a:pt x="1029681" y="968404"/>
                 </a:lnTo>
                 <a:lnTo>
-                  <a:pt x="1103715" y="1209976"/>
+                  <a:pt x="968315" y="1061540"/>
                 </a:lnTo>
                 <a:lnTo>
-                  <a:pt x="1024365" y="1309303"/>
+                  <a:pt x="898700" y="1148682"/>
                 </a:lnTo>
                 <a:lnTo>
-                  <a:pt x="936276" y="1400969"/>
+                  <a:pt x="821417" y="1229103"/>
                 </a:lnTo>
                 <a:lnTo>
-                  <a:pt x="840184" y="1484208"/>
+                  <a:pt x="737114" y="1302130"/>
                 </a:lnTo>
                 <a:lnTo>
-                  <a:pt x="736892" y="1558323"/>
+                  <a:pt x="646493" y="1367153"/>
                 </a:lnTo>
                 <a:lnTo>
-                  <a:pt x="627263" y="1622695"/>
+                  <a:pt x="550313" y="1423628"/>
                 </a:lnTo>
                 <a:lnTo>
-                  <a:pt x="512214" y="1676787"/>
+                  <a:pt x="449377" y="1471084"/>
                 </a:lnTo>
                 <a:lnTo>
-                  <a:pt x="392705" y="1720146"/>
+                  <a:pt x="344529" y="1509124"/>
                 </a:lnTo>
                 <a:lnTo>
-                  <a:pt x="269736" y="1752410"/>
+                  <a:pt x="236646" y="1537430"/>
                 </a:lnTo>
                 <a:lnTo>
-                  <a:pt x="144334" y="1773309"/>
+                  <a:pt x="126628" y="1555765"/>
                 </a:lnTo>
                 <a:lnTo>
-                  <a:pt x="17548" y="1782668"/>
+                  <a:pt x="15396" y="1563976"/>
                 </a:lnTo>
                 <a:lnTo>
-                  <a:pt x="0" y="1153817"/>
+                  <a:pt x="0" y="1012271"/>
                 </a:lnTo>
                 <a:lnTo>
-                  <a:pt x="69435" y="1148695"/>
+                  <a:pt x="60917" y="1007777"/>
                 </a:lnTo>
                 <a:lnTo>
-                  <a:pt x="138112" y="1137254"/>
+                  <a:pt x="121169" y="997739"/>
                 </a:lnTo>
                 <a:lnTo>
-                  <a:pt x="205457" y="1119587"/>
+                  <a:pt x="180252" y="982240"/>
                 </a:lnTo>
                 <a:lnTo>
-                  <a:pt x="270907" y="1095844"/>
+                  <a:pt x="237673" y="961409"/>
                 </a:lnTo>
                 <a:lnTo>
-                  <a:pt x="333915" y="1066223"/>
+                  <a:pt x="292952" y="935422"/>
                 </a:lnTo>
                 <a:lnTo>
-                  <a:pt x="393955" y="1030971"/>
+                  <a:pt x="345626" y="904495"/>
                 </a:lnTo>
                 <a:lnTo>
-                  <a:pt x="450524" y="990383"/>
+                  <a:pt x="395255" y="868886"/>
                 </a:lnTo>
                 <a:lnTo>
-                  <a:pt x="503149" y="944798"/>
+                  <a:pt x="441425" y="828893"/>
                 </a:lnTo>
                 <a:lnTo>
-                  <a:pt x="551392" y="894598"/>
+                  <a:pt x="483749" y="784851"/>
                 </a:lnTo>
                 <a:lnTo>
-                  <a:pt x="594848" y="840201"/>
+                  <a:pt x="521875" y="737127"/>
                 </a:lnTo>
                 <a:lnTo>
-                  <a:pt x="633155" y="782063"/>
+                  <a:pt x="555482" y="686121"/>
                 </a:lnTo>
                 <a:lnTo>
-                  <a:pt x="665992" y="720669"/>
+                  <a:pt x="584291" y="632259"/>
                 </a:lnTo>
                 <a:lnTo>
-                  <a:pt x="693085" y="656533"/>
+                  <a:pt x="608059" y="575991"/>
                 </a:lnTo>
                 <a:lnTo>
-                  <a:pt x="714206" y="590190"/>
+                  <a:pt x="626590" y="517787"/>
                 </a:lnTo>
                 <a:lnTo>
-                  <a:pt x="729181" y="522196"/>
+                  <a:pt x="639728" y="458134"/>
                 </a:lnTo>
                 <a:lnTo>
-                  <a:pt x="737883" y="453118"/>
+                  <a:pt x="647362" y="397531"/>
                 </a:lnTo>
                 <a:lnTo>
-                  <a:pt x="740240" y="383535"/>
+                  <a:pt x="649430" y="336483"/>
                 </a:lnTo>
                 <a:lnTo>
-                  <a:pt x="736232" y="314026"/>
+                  <a:pt x="645914" y="275502"/>
                 </a:lnTo>
                 <a:lnTo>
-                  <a:pt x="725893" y="245175"/>
+                  <a:pt x="636843" y="215097"/>
                 </a:lnTo>
                 <a:lnTo>
-                  <a:pt x="709309" y="177555"/>
+                  <a:pt x="622293" y="155773"/>
                 </a:lnTo>
                 <a:close/>
               </a:path>
@@ -41656,8 +41921,8 @@
         </p:nvSpPr>
         <p:spPr>
           <a:xfrm>
-            <a:off x="7934863" y="3154562"/>
-            <a:ext cx="1369211" cy="1782668"/>
+            <a:off x="8105442" y="3442377"/>
+            <a:ext cx="1201241" cy="1563976"/>
           </a:xfrm>
           <a:custGeom>
             <a:avLst/>
@@ -41666,132 +41931,132 @@
             <a:cxnLst/>
             <a:rect l="l" t="t" r="r" b="b"/>
             <a:pathLst>
-              <a:path w="1369211" h="1782668">
+              <a:path w="1201241" h="1563976">
                 <a:moveTo>
-                  <a:pt x="1351662" y="1782668"/>
+                  <a:pt x="1185846" y="1563976"/>
                 </a:moveTo>
                 <a:lnTo>
-                  <a:pt x="1224876" y="1773309"/>
+                  <a:pt x="1074613" y="1555765"/>
                 </a:lnTo>
                 <a:lnTo>
-                  <a:pt x="1099474" y="1752410"/>
+                  <a:pt x="964595" y="1537430"/>
                 </a:lnTo>
                 <a:lnTo>
-                  <a:pt x="976505" y="1720146"/>
+                  <a:pt x="856712" y="1509124"/>
                 </a:lnTo>
                 <a:lnTo>
-                  <a:pt x="856997" y="1676787"/>
+                  <a:pt x="751864" y="1471084"/>
                 </a:lnTo>
                 <a:lnTo>
-                  <a:pt x="741947" y="1622695"/>
+                  <a:pt x="650928" y="1423628"/>
                 </a:lnTo>
                 <a:lnTo>
-                  <a:pt x="632318" y="1558323"/>
+                  <a:pt x="554748" y="1367153"/>
                 </a:lnTo>
                 <a:lnTo>
-                  <a:pt x="529026" y="1484208"/>
+                  <a:pt x="464128" y="1302130"/>
                 </a:lnTo>
                 <a:lnTo>
-                  <a:pt x="432934" y="1400969"/>
+                  <a:pt x="379824" y="1229103"/>
                 </a:lnTo>
                 <a:lnTo>
-                  <a:pt x="344845" y="1309303"/>
+                  <a:pt x="302541" y="1148682"/>
                 </a:lnTo>
                 <a:lnTo>
-                  <a:pt x="265495" y="1209976"/>
+                  <a:pt x="232926" y="1061540"/>
                 </a:lnTo>
                 <a:lnTo>
-                  <a:pt x="195548" y="1103816"/>
+                  <a:pt x="171560" y="968404"/>
                 </a:lnTo>
                 <a:lnTo>
-                  <a:pt x="135588" y="991713"/>
+                  <a:pt x="118956" y="870053"/>
                 </a:lnTo>
                 <a:lnTo>
-                  <a:pt x="86117" y="874603"/>
+                  <a:pt x="75553" y="767309"/>
                 </a:lnTo>
                 <a:lnTo>
-                  <a:pt x="47547" y="753464"/>
+                  <a:pt x="41715" y="661031"/>
                 </a:lnTo>
                 <a:lnTo>
-                  <a:pt x="20201" y="629308"/>
+                  <a:pt x="17724" y="552107"/>
                 </a:lnTo>
                 <a:lnTo>
-                  <a:pt x="4308" y="503175"/>
+                  <a:pt x="3780" y="441446"/>
                 </a:lnTo>
                 <a:lnTo>
-                  <a:pt x="0" y="376116"/>
+                  <a:pt x="0" y="329975"/>
                 </a:lnTo>
                 <a:lnTo>
-                  <a:pt x="7313" y="249196"/>
+                  <a:pt x="6417" y="218625"/>
                 </a:lnTo>
                 <a:lnTo>
-                  <a:pt x="26187" y="123473"/>
+                  <a:pt x="22975" y="108326"/>
                 </a:lnTo>
                 <a:lnTo>
-                  <a:pt x="56463" y="0"/>
+                  <a:pt x="49537" y="0"/>
                 </a:lnTo>
                 <a:lnTo>
-                  <a:pt x="659901" y="177555"/>
+                  <a:pt x="578948" y="155773"/>
                 </a:lnTo>
                 <a:lnTo>
-                  <a:pt x="643317" y="245175"/>
+                  <a:pt x="564398" y="215097"/>
                 </a:lnTo>
                 <a:lnTo>
-                  <a:pt x="632978" y="314026"/>
+                  <a:pt x="555327" y="275502"/>
                 </a:lnTo>
                 <a:lnTo>
-                  <a:pt x="628970" y="383535"/>
+                  <a:pt x="551811" y="336483"/>
                 </a:lnTo>
                 <a:lnTo>
-                  <a:pt x="631327" y="453118"/>
+                  <a:pt x="553879" y="397531"/>
                 </a:lnTo>
                 <a:lnTo>
-                  <a:pt x="640029" y="522196"/>
+                  <a:pt x="561513" y="458134"/>
                 </a:lnTo>
                 <a:lnTo>
-                  <a:pt x="655004" y="590190"/>
+                  <a:pt x="574651" y="517787"/>
                 </a:lnTo>
                 <a:lnTo>
-                  <a:pt x="676126" y="656533"/>
+                  <a:pt x="593182" y="575991"/>
                 </a:lnTo>
                 <a:lnTo>
-                  <a:pt x="703218" y="720669"/>
+                  <a:pt x="616951" y="632259"/>
                 </a:lnTo>
                 <a:lnTo>
-                  <a:pt x="736055" y="782063"/>
+                  <a:pt x="645759" y="686121"/>
                 </a:lnTo>
                 <a:lnTo>
-                  <a:pt x="774362" y="840201"/>
+                  <a:pt x="679366" y="737127"/>
                 </a:lnTo>
                 <a:lnTo>
-                  <a:pt x="817818" y="894598"/>
+                  <a:pt x="717492" y="784851"/>
                 </a:lnTo>
                 <a:lnTo>
-                  <a:pt x="866061" y="944798"/>
+                  <a:pt x="759816" y="828893"/>
                 </a:lnTo>
                 <a:lnTo>
-                  <a:pt x="918686" y="990383"/>
+                  <a:pt x="805986" y="868886"/>
                 </a:lnTo>
                 <a:lnTo>
-                  <a:pt x="975256" y="1030971"/>
+                  <a:pt x="855615" y="904495"/>
                 </a:lnTo>
                 <a:lnTo>
-                  <a:pt x="1035295" y="1066223"/>
+                  <a:pt x="908290" y="935422"/>
                 </a:lnTo>
                 <a:lnTo>
-                  <a:pt x="1098303" y="1095844"/>
+                  <a:pt x="963568" y="961409"/>
                 </a:lnTo>
                 <a:lnTo>
-                  <a:pt x="1163753" y="1119587"/>
+                  <a:pt x="1020989" y="982240"/>
                 </a:lnTo>
                 <a:lnTo>
-                  <a:pt x="1231099" y="1137254"/>
+                  <a:pt x="1080072" y="997739"/>
                 </a:lnTo>
                 <a:lnTo>
-                  <a:pt x="1299776" y="1148695"/>
+                  <a:pt x="1140324" y="1007777"/>
                 </a:lnTo>
                 <a:lnTo>
-                  <a:pt x="1369211" y="1153817"/>
+                  <a:pt x="1201241" y="1012271"/>
                 </a:lnTo>
                 <a:close/>
               </a:path>
@@ -41835,8 +42100,8 @@
         </p:nvSpPr>
         <p:spPr>
           <a:xfrm>
-            <a:off x="8015248" y="2157109"/>
-            <a:ext cx="1288826" cy="1134613"/>
+            <a:off x="8175967" y="2567288"/>
+            <a:ext cx="1130716" cy="995423"/>
           </a:xfrm>
           <a:custGeom>
             <a:avLst/>
@@ -41845,90 +42110,90 @@
             <a:cxnLst/>
             <a:rect l="l" t="t" r="r" b="b"/>
             <a:pathLst>
-              <a:path w="1288826" h="1134613">
+              <a:path w="1130716" h="995423">
                 <a:moveTo>
-                  <a:pt x="0" y="923534"/>
+                  <a:pt x="0" y="810238"/>
                 </a:moveTo>
                 <a:lnTo>
-                  <a:pt x="48619" y="804690"/>
+                  <a:pt x="42654" y="705973"/>
                 </a:lnTo>
                 <a:lnTo>
-                  <a:pt x="107993" y="690837"/>
+                  <a:pt x="94744" y="606087"/>
                 </a:lnTo>
                 <a:lnTo>
-                  <a:pt x="177614" y="582945"/>
+                  <a:pt x="155825" y="511431"/>
                 </a:lnTo>
                 <a:lnTo>
-                  <a:pt x="256891" y="481935"/>
+                  <a:pt x="225376" y="422813"/>
                 </a:lnTo>
                 <a:lnTo>
-                  <a:pt x="345146" y="388668"/>
+                  <a:pt x="302804" y="340988"/>
                 </a:lnTo>
                 <a:lnTo>
-                  <a:pt x="441628" y="303939"/>
+                  <a:pt x="387450" y="266653"/>
                 </a:lnTo>
                 <a:lnTo>
-                  <a:pt x="545513" y="228470"/>
+                  <a:pt x="478591" y="200442"/>
                 </a:lnTo>
                 <a:lnTo>
-                  <a:pt x="655917" y="162905"/>
+                  <a:pt x="575450" y="142920"/>
                 </a:lnTo>
                 <a:lnTo>
-                  <a:pt x="771897" y="107803"/>
+                  <a:pt x="677203" y="94578"/>
                 </a:lnTo>
                 <a:lnTo>
-                  <a:pt x="892466" y="63633"/>
+                  <a:pt x="782980" y="55827"/>
                 </a:lnTo>
                 <a:lnTo>
-                  <a:pt x="1016594" y="30772"/>
+                  <a:pt x="891881" y="26997"/>
                 </a:lnTo>
                 <a:lnTo>
-                  <a:pt x="1143224" y="9501"/>
+                  <a:pt x="1002977" y="8335"/>
                 </a:lnTo>
                 <a:lnTo>
-                  <a:pt x="1271277" y="0"/>
+                  <a:pt x="1115321" y="0"/>
                 </a:lnTo>
                 <a:lnTo>
-                  <a:pt x="1288826" y="628851"/>
+                  <a:pt x="1130716" y="551705"/>
                 </a:lnTo>
                 <a:lnTo>
-                  <a:pt x="1218703" y="634057"/>
+                  <a:pt x="1069196" y="556272"/>
                 </a:lnTo>
                 <a:lnTo>
-                  <a:pt x="1149359" y="645708"/>
+                  <a:pt x="1008359" y="566495"/>
                 </a:lnTo>
                 <a:lnTo>
-                  <a:pt x="1081386" y="663706"/>
+                  <a:pt x="948725" y="582284"/>
                 </a:lnTo>
                 <a:lnTo>
-                  <a:pt x="1015362" y="687896"/>
+                  <a:pt x="890801" y="603507"/>
                 </a:lnTo>
                 <a:lnTo>
-                  <a:pt x="951851" y="718073"/>
+                  <a:pt x="835081" y="629982"/>
                 </a:lnTo>
                 <a:lnTo>
-                  <a:pt x="891395" y="753980"/>
+                  <a:pt x="782041" y="661484"/>
                 </a:lnTo>
                 <a:lnTo>
-                  <a:pt x="834507" y="795309"/>
+                  <a:pt x="732132" y="697743"/>
                 </a:lnTo>
                 <a:lnTo>
-                  <a:pt x="781675" y="841710"/>
+                  <a:pt x="685781" y="738451"/>
                 </a:lnTo>
                 <a:lnTo>
-                  <a:pt x="733347" y="892785"/>
+                  <a:pt x="643382" y="783261"/>
                 </a:lnTo>
                 <a:lnTo>
-                  <a:pt x="689936" y="948101"/>
+                  <a:pt x="605296" y="831791"/>
                 </a:lnTo>
                 <a:lnTo>
-                  <a:pt x="651812" y="1007184"/>
+                  <a:pt x="571849" y="883626"/>
                 </a:lnTo>
                 <a:lnTo>
-                  <a:pt x="619300" y="1069532"/>
+                  <a:pt x="543326" y="938325"/>
                 </a:lnTo>
                 <a:lnTo>
-                  <a:pt x="592678" y="1134613"/>
+                  <a:pt x="519970" y="995423"/>
                 </a:lnTo>
                 <a:close/>
               </a:path>
@@ -41972,8 +42237,8 @@
         </p:nvSpPr>
         <p:spPr>
           <a:xfrm>
-            <a:off x="9613369" y="2465261"/>
-            <a:ext cx="688777" cy="197007"/>
+            <a:off x="9550074" y="2832965"/>
+            <a:ext cx="660202" cy="172839"/>
           </a:xfrm>
           <a:prstGeom prst="rect">
             <a:avLst/>
@@ -41988,11 +42253,11 @@
           <a:p>
             <a:pPr algn="ctr">
               <a:lnSpc>
-                <a:spcPts val="1094"/>
+                <a:spcPts val="960"/>
               </a:lnSpc>
             </a:pPr>
             <a:r>
-              <a:rPr sz="912" b="1">
+              <a:rPr sz="800" b="1">
                 <a:solidFill>
                   <a:srgbClr val="FFFFFF"/>
                 </a:solidFill>
@@ -42013,8 +42278,8 @@
         </p:nvSpPr>
         <p:spPr>
           <a:xfrm>
-            <a:off x="9596700" y="2598938"/>
-            <a:ext cx="722114" cy="225151"/>
+            <a:off x="9535340" y="2958597"/>
+            <a:ext cx="691099" cy="197530"/>
           </a:xfrm>
           <a:prstGeom prst="rect">
             <a:avLst/>
@@ -42029,11 +42294,11 @@
           <a:p>
             <a:pPr algn="ctr">
               <a:lnSpc>
-                <a:spcPts val="1251"/>
+                <a:spcPts val="1097"/>
               </a:lnSpc>
             </a:pPr>
             <a:r>
-              <a:rPr sz="1042" b="1">
+              <a:rPr sz="914" b="1">
                 <a:solidFill>
                   <a:srgbClr val="FFFFFF"/>
                 </a:solidFill>
@@ -42054,8 +42319,8 @@
         </p:nvSpPr>
         <p:spPr>
           <a:xfrm>
-            <a:off x="9735975" y="3968476"/>
-            <a:ext cx="920353" cy="197007"/>
+            <a:off x="9657723" y="4151768"/>
+            <a:ext cx="863203" cy="172839"/>
           </a:xfrm>
           <a:prstGeom prst="rect">
             <a:avLst/>
@@ -42070,11 +42335,11 @@
           <a:p>
             <a:pPr algn="ctr">
               <a:lnSpc>
-                <a:spcPts val="1094"/>
+                <a:spcPts val="960"/>
               </a:lnSpc>
             </a:pPr>
             <a:r>
-              <a:rPr sz="912" b="1">
+              <a:rPr sz="800" b="1">
                 <a:solidFill>
                   <a:srgbClr val="FFFFFF"/>
                 </a:solidFill>
@@ -42095,8 +42360,8 @@
         </p:nvSpPr>
         <p:spPr>
           <a:xfrm>
-            <a:off x="9835095" y="4102153"/>
-            <a:ext cx="722114" cy="225151"/>
+            <a:off x="9744490" y="4277405"/>
+            <a:ext cx="691099" cy="197530"/>
           </a:xfrm>
           <a:prstGeom prst="rect">
             <a:avLst/>
@@ -42111,11 +42376,11 @@
           <a:p>
             <a:pPr algn="ctr">
               <a:lnSpc>
-                <a:spcPts val="1251"/>
+                <a:spcPts val="1097"/>
               </a:lnSpc>
             </a:pPr>
             <a:r>
-              <a:rPr sz="1042" b="1">
+              <a:rPr sz="914" b="1">
                 <a:solidFill>
                   <a:srgbClr val="FFFFFF"/>
                 </a:solidFill>
@@ -42136,8 +42401,8 @@
         </p:nvSpPr>
         <p:spPr>
           <a:xfrm>
-            <a:off x="7994365" y="3968476"/>
-            <a:ext cx="920354" cy="197007"/>
+            <a:off x="8129768" y="4151768"/>
+            <a:ext cx="863203" cy="172839"/>
           </a:xfrm>
           <a:prstGeom prst="rect">
             <a:avLst/>
@@ -42152,11 +42417,11 @@
           <a:p>
             <a:pPr algn="ctr">
               <a:lnSpc>
-                <a:spcPts val="1094"/>
+                <a:spcPts val="960"/>
               </a:lnSpc>
             </a:pPr>
             <a:r>
-              <a:rPr sz="912" b="1">
+              <a:rPr sz="800" b="1">
                 <a:solidFill>
                   <a:srgbClr val="FFFFFF"/>
                 </a:solidFill>
@@ -42177,8 +42442,8 @@
         </p:nvSpPr>
         <p:spPr>
           <a:xfrm>
-            <a:off x="8093484" y="4102153"/>
-            <a:ext cx="722114" cy="225151"/>
+            <a:off x="8216535" y="4277405"/>
+            <a:ext cx="691098" cy="197530"/>
           </a:xfrm>
           <a:prstGeom prst="rect">
             <a:avLst/>
@@ -42193,11 +42458,11 @@
           <a:p>
             <a:pPr algn="ctr">
               <a:lnSpc>
-                <a:spcPts val="1251"/>
+                <a:spcPts val="1097"/>
               </a:lnSpc>
             </a:pPr>
             <a:r>
-              <a:rPr sz="1042" b="1">
+              <a:rPr sz="914" b="1">
                 <a:solidFill>
                   <a:srgbClr val="FFFFFF"/>
                 </a:solidFill>
@@ -42218,8 +42483,8 @@
         </p:nvSpPr>
         <p:spPr>
           <a:xfrm>
-            <a:off x="8274507" y="2341096"/>
-            <a:ext cx="836861" cy="197007"/>
+            <a:off x="8375529" y="2724032"/>
+            <a:ext cx="790277" cy="172839"/>
           </a:xfrm>
           <a:prstGeom prst="rect">
             <a:avLst/>
@@ -42234,11 +42499,11 @@
           <a:p>
             <a:pPr algn="ctr">
               <a:lnSpc>
-                <a:spcPts val="1094"/>
+                <a:spcPts val="960"/>
               </a:lnSpc>
             </a:pPr>
             <a:r>
-              <a:rPr sz="912" b="1">
+              <a:rPr sz="800" b="1">
                 <a:solidFill>
                   <a:srgbClr val="FFFFFF"/>
                 </a:solidFill>
@@ -42259,8 +42524,8 @@
         </p:nvSpPr>
         <p:spPr>
           <a:xfrm>
-            <a:off x="8232760" y="2498370"/>
-            <a:ext cx="920353" cy="197007"/>
+            <a:off x="8338918" y="2862014"/>
+            <a:ext cx="866477" cy="172839"/>
           </a:xfrm>
           <a:prstGeom prst="rect">
             <a:avLst/>
@@ -42275,11 +42540,11 @@
           <a:p>
             <a:pPr algn="ctr">
               <a:lnSpc>
-                <a:spcPts val="1094"/>
+                <a:spcPts val="960"/>
               </a:lnSpc>
             </a:pPr>
             <a:r>
-              <a:rPr sz="912" b="1">
+              <a:rPr sz="800" b="1">
                 <a:solidFill>
                   <a:srgbClr val="FFFFFF"/>
                 </a:solidFill>
@@ -42300,8 +42565,8 @@
         </p:nvSpPr>
         <p:spPr>
           <a:xfrm>
-            <a:off x="8331880" y="2632052"/>
-            <a:ext cx="722115" cy="225151"/>
+            <a:off x="8425685" y="2987646"/>
+            <a:ext cx="691097" cy="197530"/>
           </a:xfrm>
           <a:prstGeom prst="rect">
             <a:avLst/>
@@ -42316,11 +42581,11 @@
           <a:p>
             <a:pPr algn="ctr">
               <a:lnSpc>
-                <a:spcPts val="1251"/>
+                <a:spcPts val="1097"/>
               </a:lnSpc>
             </a:pPr>
             <a:r>
-              <a:rPr sz="1042" b="1">
+              <a:rPr sz="914" b="1">
                 <a:solidFill>
                   <a:srgbClr val="FFFFFF"/>
                 </a:solidFill>
@@ -42341,8 +42606,8 @@
         </p:nvSpPr>
         <p:spPr>
           <a:xfrm>
-            <a:off x="8714839" y="3066771"/>
-            <a:ext cx="1221016" cy="731741"/>
+            <a:off x="8781827" y="3361532"/>
+            <a:ext cx="1087041" cy="641974"/>
           </a:xfrm>
           <a:prstGeom prst="rect">
             <a:avLst/>
@@ -42357,11 +42622,11 @@
           <a:p>
             <a:pPr algn="ctr">
               <a:lnSpc>
-                <a:spcPts val="4067"/>
+                <a:spcPts val="3568"/>
               </a:lnSpc>
             </a:pPr>
             <a:r>
-              <a:rPr sz="3389" b="1">
+              <a:rPr sz="2973" b="1">
                 <a:solidFill>
                   <a:srgbClr val="17365D"/>
                 </a:solidFill>
@@ -42382,8 +42647,8 @@
         </p:nvSpPr>
         <p:spPr>
           <a:xfrm>
-            <a:off x="8972773" y="3647096"/>
-            <a:ext cx="705148" cy="211079"/>
+            <a:off x="8987954" y="3873993"/>
+            <a:ext cx="674787" cy="185185"/>
           </a:xfrm>
           <a:prstGeom prst="rect">
             <a:avLst/>
@@ -42398,11 +42663,11 @@
           <a:p>
             <a:pPr algn="ctr">
               <a:lnSpc>
-                <a:spcPts val="1173"/>
+                <a:spcPts val="1029"/>
               </a:lnSpc>
             </a:pPr>
             <a:r>
-              <a:rPr sz="977" b="1">
+              <a:rPr sz="857" b="1">
                 <a:solidFill>
                   <a:srgbClr val="63666B"/>
                 </a:solidFill>
@@ -42418,6 +42683,132 @@
       <p:sp>
         <p:nvSpPr>
           <p:cNvPr id="36" name="Rectangle 35"/>
+          <p:cNvSpPr/>
+          <p:nvPr/>
+        </p:nvSpPr>
+        <p:spPr>
+          <a:xfrm>
+            <a:off x="8700802" y="1622700"/>
+            <a:ext cx="1975304" cy="305010"/>
+          </a:xfrm>
+          <a:prstGeom prst="rect">
+            <a:avLst/>
+          </a:prstGeom>
+          <a:solidFill>
+            <a:srgbClr val="005BAC"/>
+          </a:solidFill>
+          <a:ln>
+            <a:noFill/>
+          </a:ln>
+          <a:effectLst/>
+        </p:spPr>
+        <p:style>
+          <a:lnRef idx="1">
+            <a:schemeClr val="accent1"/>
+          </a:lnRef>
+          <a:fillRef idx="3">
+            <a:schemeClr val="accent1"/>
+          </a:fillRef>
+          <a:effectRef idx="2">
+            <a:schemeClr val="accent1"/>
+          </a:effectRef>
+          <a:fontRef idx="minor">
+            <a:schemeClr val="lt1"/>
+          </a:fontRef>
+        </p:style>
+        <p:txBody>
+          <a:bodyPr rtlCol="0" anchor="ctr" wrap="none"/>
+          <a:lstStyle/>
+          <a:p>
+            <a:pPr algn="ctr"/>
+          </a:p>
+        </p:txBody>
+      </p:sp>
+      <p:sp>
+        <p:nvSpPr>
+          <p:cNvPr id="37" name="TextBox 36"/>
+          <p:cNvSpPr txBox="1"/>
+          <p:nvPr/>
+        </p:nvSpPr>
+        <p:spPr>
+          <a:xfrm>
+            <a:off x="8595595" y="1630506"/>
+            <a:ext cx="558998" cy="296296"/>
+          </a:xfrm>
+          <a:prstGeom prst="rect">
+            <a:avLst/>
+          </a:prstGeom>
+          <a:noFill/>
+        </p:spPr>
+        <p:txBody>
+          <a:bodyPr wrap="none" lIns="0" rIns="0" tIns="0" bIns="0" anchor="ctr">
+            <a:noAutofit/>
+          </a:bodyPr>
+          <a:lstStyle/>
+          <a:p>
+            <a:pPr algn="ctr">
+              <a:lnSpc>
+                <a:spcPts val="1646"/>
+              </a:lnSpc>
+            </a:pPr>
+            <a:r>
+              <a:rPr sz="1372" b="1">
+                <a:solidFill>
+                  <a:srgbClr val="FFFFFF"/>
+                </a:solidFill>
+                <a:latin typeface="Arial"/>
+                <a:ea typeface="맑은 고딕"/>
+                <a:cs typeface="맑은 고딕"/>
+              </a:rPr>
+              <a:t>+</a:t>
+            </a:r>
+          </a:p>
+        </p:txBody>
+      </p:sp>
+      <p:sp>
+        <p:nvSpPr>
+          <p:cNvPr id="38" name="TextBox 37"/>
+          <p:cNvSpPr txBox="1"/>
+          <p:nvPr/>
+        </p:nvSpPr>
+        <p:spPr>
+          <a:xfrm>
+            <a:off x="8971044" y="1689177"/>
+            <a:ext cx="1754356" cy="197530"/>
+          </a:xfrm>
+          <a:prstGeom prst="rect">
+            <a:avLst/>
+          </a:prstGeom>
+          <a:noFill/>
+        </p:spPr>
+        <p:txBody>
+          <a:bodyPr wrap="none" lIns="0" rIns="0" tIns="0" bIns="0" anchor="ctr">
+            <a:noAutofit/>
+          </a:bodyPr>
+          <a:lstStyle/>
+          <a:p>
+            <a:pPr algn="ctr">
+              <a:lnSpc>
+                <a:spcPts val="1097"/>
+              </a:lnSpc>
+            </a:pPr>
+            <a:r>
+              <a:rPr sz="914" b="1">
+                <a:solidFill>
+                  <a:srgbClr val="FFFFFF"/>
+                </a:solidFill>
+                <a:latin typeface="맑은 고딕"/>
+                <a:ea typeface="맑은 고딕"/>
+                <a:cs typeface="맑은 고딕"/>
+              </a:rPr>
+              <a:t>취·창업 및 진로상담</a:t>
+            </a:r>
+          </a:p>
+        </p:txBody>
+      </p:sp>
+      <p:sp>
+        <p:nvSpPr>
+          <p:cNvPr id="39" name="Rectangle 38"/>
           <p:cNvSpPr/>
           <p:nvPr/>
         </p:nvSpPr>
@@ -42461,7 +42852,7 @@
       </p:sp>
       <p:cxnSp>
         <p:nvCxnSpPr>
-          <p:cNvPr id="37" name="Connector 36"/>
+          <p:cNvPr id="40" name="Connector 39"/>
           <p:cNvCxnSpPr/>
           <p:nvPr/>
         </p:nvCxnSpPr>
@@ -42497,7 +42888,7 @@
       </p:cxnSp>
       <p:cxnSp>
         <p:nvCxnSpPr>
-          <p:cNvPr id="38" name="Connector 37"/>
+          <p:cNvPr id="41" name="Connector 40"/>
           <p:cNvCxnSpPr/>
           <p:nvPr/>
         </p:nvCxnSpPr>
@@ -42533,7 +42924,7 @@
       </p:cxnSp>
       <p:cxnSp>
         <p:nvCxnSpPr>
-          <p:cNvPr id="39" name="Connector 38"/>
+          <p:cNvPr id="42" name="Connector 41"/>
           <p:cNvCxnSpPr/>
           <p:nvPr/>
         </p:nvCxnSpPr>
@@ -42569,7 +42960,7 @@
       </p:cxnSp>
       <p:cxnSp>
         <p:nvCxnSpPr>
-          <p:cNvPr id="40" name="Connector 39"/>
+          <p:cNvPr id="43" name="Connector 42"/>
           <p:cNvCxnSpPr/>
           <p:nvPr/>
         </p:nvCxnSpPr>
@@ -42605,7 +42996,7 @@
       </p:cxnSp>
       <p:sp>
         <p:nvSpPr>
-          <p:cNvPr id="41" name="TextBox 40"/>
+          <p:cNvPr id="44" name="TextBox 43"/>
           <p:cNvSpPr txBox="1"/>
           <p:nvPr/>
         </p:nvSpPr>
@@ -42652,7 +43043,7 @@
       </p:sp>
       <p:sp>
         <p:nvSpPr>
-          <p:cNvPr id="42" name="TextBox 41"/>
+          <p:cNvPr id="45" name="TextBox 44"/>
           <p:cNvSpPr txBox="1"/>
           <p:nvPr/>
         </p:nvSpPr>
@@ -42710,7 +43101,7 @@
       </p:sp>
       <p:sp>
         <p:nvSpPr>
-          <p:cNvPr id="43" name="TextBox 42"/>
+          <p:cNvPr id="46" name="TextBox 45"/>
           <p:cNvSpPr txBox="1"/>
           <p:nvPr/>
         </p:nvSpPr>
